--- a/presentation/output/DivX-Stocklana-2026-v4.pptx
+++ b/presentation/output/DivX-Stocklana-2026-v4.pptx
@@ -2,21 +2,21 @@
 <file path=ppt/presentation.xml><?xml version="1.0" encoding="utf-8"?>
 <p:presentation xmlns:p="http://schemas.openxmlformats.org/presentationml/2006/main">
   <p:sldMasterIdLst>
-    <p:sldMasterId xmlns:r="http://schemas.openxmlformats.org/officeDocument/2006/relationships" id="2147483648" r:id="R6ad8d0af62e648cb"/>
+    <p:sldMasterId xmlns:r="http://schemas.openxmlformats.org/officeDocument/2006/relationships" id="2147483648" r:id="R58447e747e8f4ddf"/>
   </p:sldMasterIdLst>
   <p:notesMasterIdLst>
-    <p:notesMasterId xmlns:r="http://schemas.openxmlformats.org/officeDocument/2006/relationships" r:id="Rbd8669ac2e6748c6"/>
+    <p:notesMasterId xmlns:r="http://schemas.openxmlformats.org/officeDocument/2006/relationships" r:id="R856e487853f24e56"/>
   </p:notesMasterIdLst>
   <p:sldIdLst>
-    <p:sldId xmlns:r="http://schemas.openxmlformats.org/officeDocument/2006/relationships" id="256" r:id="Ra5075e8bd1ee424f"/>
-    <p:sldId xmlns:r="http://schemas.openxmlformats.org/officeDocument/2006/relationships" id="257" r:id="R5e64c869a8794371"/>
-    <p:sldId xmlns:r="http://schemas.openxmlformats.org/officeDocument/2006/relationships" id="258" r:id="Rf516b21c23bb47a4"/>
-    <p:sldId xmlns:r="http://schemas.openxmlformats.org/officeDocument/2006/relationships" id="259" r:id="R3e238638ffa444b9"/>
-    <p:sldId xmlns:r="http://schemas.openxmlformats.org/officeDocument/2006/relationships" id="260" r:id="Rea738a2aba6d4edd"/>
-    <p:sldId xmlns:r="http://schemas.openxmlformats.org/officeDocument/2006/relationships" id="261" r:id="Raaf438cfab0944e3"/>
-    <p:sldId xmlns:r="http://schemas.openxmlformats.org/officeDocument/2006/relationships" id="262" r:id="R8899160553774a6c"/>
-    <p:sldId xmlns:r="http://schemas.openxmlformats.org/officeDocument/2006/relationships" id="263" r:id="Rb5bab1427a754258"/>
-    <p:sldId xmlns:r="http://schemas.openxmlformats.org/officeDocument/2006/relationships" id="264" r:id="R1c6dda4aa9d74237"/>
+    <p:sldId xmlns:r="http://schemas.openxmlformats.org/officeDocument/2006/relationships" id="256" r:id="Rf9bc1f0729864593"/>
+    <p:sldId xmlns:r="http://schemas.openxmlformats.org/officeDocument/2006/relationships" id="257" r:id="R96f3342fef0b4c81"/>
+    <p:sldId xmlns:r="http://schemas.openxmlformats.org/officeDocument/2006/relationships" id="258" r:id="R5f956f6d3e304a59"/>
+    <p:sldId xmlns:r="http://schemas.openxmlformats.org/officeDocument/2006/relationships" id="259" r:id="R6ff1c3a53d144d23"/>
+    <p:sldId xmlns:r="http://schemas.openxmlformats.org/officeDocument/2006/relationships" id="260" r:id="R2e531d75cdec4fe1"/>
+    <p:sldId xmlns:r="http://schemas.openxmlformats.org/officeDocument/2006/relationships" id="261" r:id="R373d94450e3e45b4"/>
+    <p:sldId xmlns:r="http://schemas.openxmlformats.org/officeDocument/2006/relationships" id="262" r:id="R2dc1d560ed43401c"/>
+    <p:sldId xmlns:r="http://schemas.openxmlformats.org/officeDocument/2006/relationships" id="263" r:id="Rfb20c76443d248c9"/>
+    <p:sldId xmlns:r="http://schemas.openxmlformats.org/officeDocument/2006/relationships" id="264" r:id="R02c2f1ff9acc4a1c"/>
   </p:sldIdLst>
   <p:sldSz cx="12192000" cy="6858000"/>
   <p:notesSz cx="6858000" cy="9144000"/>
@@ -1010,7 +1010,7 @@
           <a:lstStyle xmlns:a="http://schemas.openxmlformats.org/drawingml/2006/main"/>
           <a:p xmlns:a="http://schemas.openxmlformats.org/drawingml/2006/main">
             <a:r>
-              <a:t>Narration: The guided tour at https://dividendx.payai.network/demos/ lets anyone split a stock token, put it back together, see the dividend effect and trade dividend rights with a second wallet. It runs real program transactions in a private sandbox with synthetic assets and accelerated time. The public devnet app uses the real calendar. Our test catalog represents selected stocks from Ondo, Backpack and xStocks.</a:t>
+              <a:t>Narration: The guided tour at https://divx.payai.network/demos/ lets anyone split a stock token, put it back together, see the dividend effect and trade dividend rights with a second wallet. It runs real program transactions in a private sandbox with synthetic assets and accelerated time. The public devnet app uses the real calendar. Our test catalog represents selected stocks from Ondo, Backpack and xStocks.</a:t>
             </a:r>
           </a:p>
           <a:p xmlns:a="http://schemas.openxmlformats.org/drawingml/2006/main">
@@ -1020,7 +1020,7 @@
           </a:p>
           <a:p xmlns:a="http://schemas.openxmlformats.org/drawingml/2006/main">
             <a:r>
-              <a:t>Sources and evidence: https://dividendx.payai.network/demos/ | https://dividendx.payai.network/app/ | https://solscan.io/account/2EpQ2iKz921Ce2rremdnFrqG15DQq3Y2rSXbgixceDQE?cluster=devnet | planning/mainnet-readiness-2026-09-20.md | planning/guided-lazy-entry-review-2026-09-21.md</a:t>
+              <a:t>Sources and evidence: https://divx.payai.network/demos/ | https://divx.payai.network/app/ | https://solscan.io/account/2EpQ2iKz921Ce2rremdnFrqG15DQq3Y2rSXbgixceDQE?cluster=devnet | planning/mainnet-readiness-2026-09-20.md | planning/guided-lazy-entry-review-2026-09-21.md</a:t>
             </a:r>
           </a:p>
         </p:txBody>
@@ -1090,7 +1090,7 @@
           <a:lstStyle xmlns:a="http://schemas.openxmlformats.org/drawingml/2006/main"/>
           <a:p xmlns:a="http://schemas.openxmlformats.org/drawingml/2006/main">
             <a:r>
-              <a:t>Narration: The annual program, transaction SDK and guided demo are working. Before mainnet, we need complete issuer records, reviewed settlement operations, independent security review and legal and issuer checks. More liquidity, rolling dividend strategies and other networks come later. Try the guided demo at dividendx.payai.network. No wallet or real funds are needed.</a:t>
+              <a:t>Narration: The annual program, transaction SDK and guided demo are working. Before mainnet, we need complete issuer records, reviewed settlement operations, independent security review and legal and issuer checks. More liquidity, rolling dividend strategies and other networks come later. Try the guided demo at divx.payai.network. No wallet or real funds are needed.</a:t>
             </a:r>
           </a:p>
           <a:p xmlns:a="http://schemas.openxmlformats.org/drawingml/2006/main">
@@ -1100,7 +1100,7 @@
           </a:p>
           <a:p xmlns:a="http://schemas.openxmlformats.org/drawingml/2006/main">
             <a:r>
-              <a:t>Sources and evidence: planning/mainnet-readiness-2026-09-20.md | https://dividendx.payai.network/ | https://github.com/notorious-d-e-v/dividendx-stocklana | https://hackathons.solana.com/hackathons/stocklana</a:t>
+              <a:t>Sources and evidence: planning/mainnet-readiness-2026-09-20.md | https://divx.payai.network/ | https://github.com/notorious-d-e-v/dividendx-stocklana | https://hackathons.solana.com/hackathons/stocklana</a:t>
             </a:r>
           </a:p>
         </p:txBody>
@@ -1168,7 +1168,7 @@
   </p:cSld>
   <p:clrMap bg1="lt1" tx1="dk1" bg2="lt2" tx2="dk2" accent1="accent1" accent2="accent2" accent3="accent3" accent4="accent4" accent5="accent5" accent6="accent6" hlink="hlink" folHlink="folHlink"/>
   <p:sldLayoutIdLst>
-    <p:sldLayoutId xmlns:r="http://schemas.openxmlformats.org/officeDocument/2006/relationships" id="2147483649" r:id="Rb937e889e8c147fe"/>
+    <p:sldLayoutId xmlns:r="http://schemas.openxmlformats.org/officeDocument/2006/relationships" id="2147483649" r:id="R532a2af851614cdf"/>
   </p:sldLayoutIdLst>
   <p:txStyles>
     <p:titleStyle>
@@ -1719,7 +1719,7 @@
           <p:cNvPr id="9" name="">
             <a:extLst xmlns:a="http://schemas.openxmlformats.org/drawingml/2006/main">
               <a:ext uri="{FF2B5EF4-FFF2-40B4-BE49-F238E27FC236}">
-                <a16:creationId xmlns:a16="http://schemas.microsoft.com/office/drawing/2014/main" id="{91811317-451C-4257-B2D8-ADF096D0A73C}"/>
+                <a16:creationId xmlns:a16="http://schemas.microsoft.com/office/drawing/2014/main" id="{65BABBC1-3ECF-4206-990A-326AC22E7AF1}"/>
               </a:ext>
             </a:extLst>
           </p:cNvPr>
@@ -1750,7 +1750,7 @@
           <p:cNvPr id="2" name="">
             <a:extLst xmlns:a="http://schemas.openxmlformats.org/drawingml/2006/main">
               <a:ext uri="{FF2B5EF4-FFF2-40B4-BE49-F238E27FC236}">
-                <a16:creationId xmlns:a16="http://schemas.microsoft.com/office/drawing/2014/main" id="{52655230-BCBE-4BA3-BC62-E80741A8A8B1}"/>
+                <a16:creationId xmlns:a16="http://schemas.microsoft.com/office/drawing/2014/main" id="{BEDCBF3F-4A26-4E2B-AD39-7048C0A5EABD}"/>
               </a:ext>
             </a:extLst>
           </p:cNvPr>
@@ -1781,7 +1781,7 @@
           <p:cNvPr id="3" name="">
             <a:extLst xmlns:a="http://schemas.openxmlformats.org/drawingml/2006/main">
               <a:ext uri="{FF2B5EF4-FFF2-40B4-BE49-F238E27FC236}">
-                <a16:creationId xmlns:a16="http://schemas.microsoft.com/office/drawing/2014/main" id="{9660771A-A575-44AF-8CA7-3C3CD917FD77}"/>
+                <a16:creationId xmlns:a16="http://schemas.microsoft.com/office/drawing/2014/main" id="{48F04448-DE01-49B4-B69F-788F0E898655}"/>
               </a:ext>
             </a:extLst>
           </p:cNvPr>
@@ -1842,7 +1842,7 @@
           <p:cNvPr id="4" name="">
             <a:extLst xmlns:a="http://schemas.openxmlformats.org/drawingml/2006/main">
               <a:ext uri="{FF2B5EF4-FFF2-40B4-BE49-F238E27FC236}">
-                <a16:creationId xmlns:a16="http://schemas.microsoft.com/office/drawing/2014/main" id="{CA715A1A-03B8-4A2A-9C85-AB3598C3082A}"/>
+                <a16:creationId xmlns:a16="http://schemas.microsoft.com/office/drawing/2014/main" id="{F6FC4106-DDC7-47E6-B32B-E4577563CF04}"/>
               </a:ext>
             </a:extLst>
           </p:cNvPr>
@@ -1903,7 +1903,7 @@
           <p:cNvPr id="5" name="">
             <a:extLst xmlns:a="http://schemas.openxmlformats.org/drawingml/2006/main">
               <a:ext uri="{FF2B5EF4-FFF2-40B4-BE49-F238E27FC236}">
-                <a16:creationId xmlns:a16="http://schemas.microsoft.com/office/drawing/2014/main" id="{572C28B1-3E58-4242-938F-DE3D018C15CE}"/>
+                <a16:creationId xmlns:a16="http://schemas.microsoft.com/office/drawing/2014/main" id="{C1DACE1C-B453-480B-BD69-916F3C630A2C}"/>
               </a:ext>
             </a:extLst>
           </p:cNvPr>
@@ -1972,7 +1972,7 @@
           <p:cNvPr id="6" name="">
             <a:extLst xmlns:a="http://schemas.openxmlformats.org/drawingml/2006/main">
               <a:ext uri="{FF2B5EF4-FFF2-40B4-BE49-F238E27FC236}">
-                <a16:creationId xmlns:a16="http://schemas.microsoft.com/office/drawing/2014/main" id="{8355C53B-85A7-4C87-A47B-5EBCA30E6C8E}"/>
+                <a16:creationId xmlns:a16="http://schemas.microsoft.com/office/drawing/2014/main" id="{1D275EB1-2F9B-478D-B53D-F23787720650}"/>
               </a:ext>
             </a:extLst>
           </p:cNvPr>
@@ -2033,7 +2033,7 @@
           <p:cNvPr id="7" name="">
             <a:extLst xmlns:a="http://schemas.openxmlformats.org/drawingml/2006/main">
               <a:ext uri="{FF2B5EF4-FFF2-40B4-BE49-F238E27FC236}">
-                <a16:creationId xmlns:a16="http://schemas.microsoft.com/office/drawing/2014/main" id="{9D3E5C20-43C0-4822-9BCB-56FBA753C4B6}"/>
+                <a16:creationId xmlns:a16="http://schemas.microsoft.com/office/drawing/2014/main" id="{71784492-44B1-48A5-81A8-A9F17A089F55}"/>
               </a:ext>
             </a:extLst>
           </p:cNvPr>
@@ -2064,7 +2064,7 @@
           <p:cNvPr id="8" name="">
             <a:extLst xmlns:a="http://schemas.openxmlformats.org/drawingml/2006/main">
               <a:ext uri="{FF2B5EF4-FFF2-40B4-BE49-F238E27FC236}">
-                <a16:creationId xmlns:a16="http://schemas.microsoft.com/office/drawing/2014/main" id="{77496856-B2D1-49A5-B79C-91F132DC9A04}"/>
+                <a16:creationId xmlns:a16="http://schemas.microsoft.com/office/drawing/2014/main" id="{BE824D56-2092-42CC-91D3-B80243A7C413}"/>
               </a:ext>
             </a:extLst>
           </p:cNvPr>
@@ -2123,7 +2123,7 @@
     </p:spTree>
     <p:extLst>
       <p:ext uri="{BB962C8B-B14F-4D97-AF65-F5344CB8AC3E}">
-        <p14:creationId xmlns:p14="http://schemas.microsoft.com/office/powerpoint/2010/main" val="15275296"/>
+        <p14:creationId xmlns:p14="http://schemas.microsoft.com/office/powerpoint/2010/main" val="1786171788"/>
       </p:ext>
     </p:extLst>
   </p:cSld>
@@ -2154,7 +2154,7 @@
           <p:cNvPr id="20" name="">
             <a:extLst xmlns:a="http://schemas.openxmlformats.org/drawingml/2006/main">
               <a:ext uri="{FF2B5EF4-FFF2-40B4-BE49-F238E27FC236}">
-                <a16:creationId xmlns:a16="http://schemas.microsoft.com/office/drawing/2014/main" id="{30186CCA-D88A-450C-9C31-E79D0F9AB0FB}"/>
+                <a16:creationId xmlns:a16="http://schemas.microsoft.com/office/drawing/2014/main" id="{BB7BE453-F664-46EE-A3F5-05105F42E5B7}"/>
               </a:ext>
             </a:extLst>
           </p:cNvPr>
@@ -2185,7 +2185,7 @@
           <p:cNvPr id="2" name="">
             <a:extLst xmlns:a="http://schemas.openxmlformats.org/drawingml/2006/main">
               <a:ext uri="{FF2B5EF4-FFF2-40B4-BE49-F238E27FC236}">
-                <a16:creationId xmlns:a16="http://schemas.microsoft.com/office/drawing/2014/main" id="{800F4BBD-D963-468A-AC6A-CBEADC2B5866}"/>
+                <a16:creationId xmlns:a16="http://schemas.microsoft.com/office/drawing/2014/main" id="{3219D573-85C3-43D5-8B5F-16F99CF55BF6}"/>
               </a:ext>
             </a:extLst>
           </p:cNvPr>
@@ -2216,7 +2216,7 @@
           <p:cNvPr id="3" name="">
             <a:extLst xmlns:a="http://schemas.openxmlformats.org/drawingml/2006/main">
               <a:ext uri="{FF2B5EF4-FFF2-40B4-BE49-F238E27FC236}">
-                <a16:creationId xmlns:a16="http://schemas.microsoft.com/office/drawing/2014/main" id="{3B8BA499-704A-4EB9-9156-55C171E6FC94}"/>
+                <a16:creationId xmlns:a16="http://schemas.microsoft.com/office/drawing/2014/main" id="{E528EDC4-70A6-41AD-A5C7-96CBC5544C55}"/>
               </a:ext>
             </a:extLst>
           </p:cNvPr>
@@ -2277,7 +2277,7 @@
           <p:cNvPr id="4" name="">
             <a:extLst xmlns:a="http://schemas.openxmlformats.org/drawingml/2006/main">
               <a:ext uri="{FF2B5EF4-FFF2-40B4-BE49-F238E27FC236}">
-                <a16:creationId xmlns:a16="http://schemas.microsoft.com/office/drawing/2014/main" id="{4C353984-3BB4-4CA1-ABF4-1D3F663074FE}"/>
+                <a16:creationId xmlns:a16="http://schemas.microsoft.com/office/drawing/2014/main" id="{447DA09C-AB82-4CE4-A4C6-BFF2048482D0}"/>
               </a:ext>
             </a:extLst>
           </p:cNvPr>
@@ -2338,7 +2338,7 @@
           <p:cNvPr id="5" name="">
             <a:extLst xmlns:a="http://schemas.openxmlformats.org/drawingml/2006/main">
               <a:ext uri="{FF2B5EF4-FFF2-40B4-BE49-F238E27FC236}">
-                <a16:creationId xmlns:a16="http://schemas.microsoft.com/office/drawing/2014/main" id="{480BB074-63D2-4953-9B8C-BF4AABD7B04D}"/>
+                <a16:creationId xmlns:a16="http://schemas.microsoft.com/office/drawing/2014/main" id="{77883C8A-1F89-46BF-B84C-8C3D3F2FC0D0}"/>
               </a:ext>
             </a:extLst>
           </p:cNvPr>
@@ -2399,7 +2399,7 @@
           <p:cNvPr id="6" name="">
             <a:extLst xmlns:a="http://schemas.openxmlformats.org/drawingml/2006/main">
               <a:ext uri="{FF2B5EF4-FFF2-40B4-BE49-F238E27FC236}">
-                <a16:creationId xmlns:a16="http://schemas.microsoft.com/office/drawing/2014/main" id="{4AFD4379-327B-4137-BF3F-AEE317388A7B}"/>
+                <a16:creationId xmlns:a16="http://schemas.microsoft.com/office/drawing/2014/main" id="{F9CED400-8D5A-4C43-B19C-62D5F09632C5}"/>
               </a:ext>
             </a:extLst>
           </p:cNvPr>
@@ -2460,7 +2460,7 @@
           <p:cNvPr id="7" name="">
             <a:extLst xmlns:a="http://schemas.openxmlformats.org/drawingml/2006/main">
               <a:ext uri="{FF2B5EF4-FFF2-40B4-BE49-F238E27FC236}">
-                <a16:creationId xmlns:a16="http://schemas.microsoft.com/office/drawing/2014/main" id="{F8B8F305-40AE-4ECE-9D8F-E4A094C96005}"/>
+                <a16:creationId xmlns:a16="http://schemas.microsoft.com/office/drawing/2014/main" id="{B7D24851-3A69-4CD9-9685-1CA001559975}"/>
               </a:ext>
             </a:extLst>
           </p:cNvPr>
@@ -2521,7 +2521,7 @@
           <p:cNvPr id="8" name="">
             <a:extLst xmlns:a="http://schemas.openxmlformats.org/drawingml/2006/main">
               <a:ext uri="{FF2B5EF4-FFF2-40B4-BE49-F238E27FC236}">
-                <a16:creationId xmlns:a16="http://schemas.microsoft.com/office/drawing/2014/main" id="{D462F46D-D0EE-44F7-AEB2-8C16A18FE648}"/>
+                <a16:creationId xmlns:a16="http://schemas.microsoft.com/office/drawing/2014/main" id="{AB6A47AB-E3F6-49B2-B7AB-FFAAB4906497}"/>
               </a:ext>
             </a:extLst>
           </p:cNvPr>
@@ -2582,7 +2582,7 @@
           <p:cNvPr id="9" name="">
             <a:extLst xmlns:a="http://schemas.openxmlformats.org/drawingml/2006/main">
               <a:ext uri="{FF2B5EF4-FFF2-40B4-BE49-F238E27FC236}">
-                <a16:creationId xmlns:a16="http://schemas.microsoft.com/office/drawing/2014/main" id="{078CFF3A-46D5-428E-9F95-A68D4599475B}"/>
+                <a16:creationId xmlns:a16="http://schemas.microsoft.com/office/drawing/2014/main" id="{72FE4485-CF9D-4AB7-97D0-298F9E4E3E33}"/>
               </a:ext>
             </a:extLst>
           </p:cNvPr>
@@ -2643,7 +2643,7 @@
           <p:cNvPr id="10" name="">
             <a:extLst xmlns:a="http://schemas.openxmlformats.org/drawingml/2006/main">
               <a:ext uri="{FF2B5EF4-FFF2-40B4-BE49-F238E27FC236}">
-                <a16:creationId xmlns:a16="http://schemas.microsoft.com/office/drawing/2014/main" id="{DBF1B0CF-FAC3-439F-ABC9-965BBDAB4DC0}"/>
+                <a16:creationId xmlns:a16="http://schemas.microsoft.com/office/drawing/2014/main" id="{B0E66CEC-0F40-4CF1-9B42-1C184F02A6EA}"/>
               </a:ext>
             </a:extLst>
           </p:cNvPr>
@@ -2704,7 +2704,7 @@
           <p:cNvPr id="11" name="">
             <a:extLst xmlns:a="http://schemas.openxmlformats.org/drawingml/2006/main">
               <a:ext uri="{FF2B5EF4-FFF2-40B4-BE49-F238E27FC236}">
-                <a16:creationId xmlns:a16="http://schemas.microsoft.com/office/drawing/2014/main" id="{F8971EA1-718D-46F7-9761-1792227B68E1}"/>
+                <a16:creationId xmlns:a16="http://schemas.microsoft.com/office/drawing/2014/main" id="{CC5B9A5E-76F5-465D-88D9-D99AC41031D8}"/>
               </a:ext>
             </a:extLst>
           </p:cNvPr>
@@ -2765,7 +2765,7 @@
           <p:cNvPr id="12" name="">
             <a:extLst xmlns:a="http://schemas.openxmlformats.org/drawingml/2006/main">
               <a:ext uri="{FF2B5EF4-FFF2-40B4-BE49-F238E27FC236}">
-                <a16:creationId xmlns:a16="http://schemas.microsoft.com/office/drawing/2014/main" id="{AC4D3252-3E68-47DF-BABB-F76E21D92607}"/>
+                <a16:creationId xmlns:a16="http://schemas.microsoft.com/office/drawing/2014/main" id="{A2396D49-6E90-412C-8158-99C9A9978CC4}"/>
               </a:ext>
             </a:extLst>
           </p:cNvPr>
@@ -2826,7 +2826,7 @@
           <p:cNvPr id="13" name="">
             <a:extLst xmlns:a="http://schemas.openxmlformats.org/drawingml/2006/main">
               <a:ext uri="{FF2B5EF4-FFF2-40B4-BE49-F238E27FC236}">
-                <a16:creationId xmlns:a16="http://schemas.microsoft.com/office/drawing/2014/main" id="{CE3DE2B8-CF45-4D08-A119-CF1D2375EA14}"/>
+                <a16:creationId xmlns:a16="http://schemas.microsoft.com/office/drawing/2014/main" id="{30A603F4-D34C-4F87-B4FC-E17A5F45431B}"/>
               </a:ext>
             </a:extLst>
           </p:cNvPr>
@@ -2857,7 +2857,7 @@
           <p:cNvPr id="14" name="">
             <a:extLst xmlns:a="http://schemas.openxmlformats.org/drawingml/2006/main">
               <a:ext uri="{FF2B5EF4-FFF2-40B4-BE49-F238E27FC236}">
-                <a16:creationId xmlns:a16="http://schemas.microsoft.com/office/drawing/2014/main" id="{32DC931F-2811-493D-9CFF-6D1FDDCAB78D}"/>
+                <a16:creationId xmlns:a16="http://schemas.microsoft.com/office/drawing/2014/main" id="{E6AE3D65-B7AC-40EB-86CA-37D6F0B67CB3}"/>
               </a:ext>
             </a:extLst>
           </p:cNvPr>
@@ -2922,7 +2922,7 @@
           <p:nvPr/>
         </p:nvPicPr>
         <p:blipFill>
-          <a:blip xmlns:r="http://schemas.openxmlformats.org/officeDocument/2006/relationships" xmlns:a="http://schemas.openxmlformats.org/drawingml/2006/main" r:embed="Rc5111b6e9e7e453f"/>
+          <a:blip xmlns:r="http://schemas.openxmlformats.org/officeDocument/2006/relationships" xmlns:a="http://schemas.openxmlformats.org/drawingml/2006/main" r:embed="R48f438d7df1e4f55"/>
           <a:stretch xmlns:a="http://schemas.openxmlformats.org/drawingml/2006/main"/>
         </p:blipFill>
         <p:spPr>
@@ -2940,7 +2940,7 @@
           <p:cNvPr id="16" name="">
             <a:extLst xmlns:a="http://schemas.openxmlformats.org/drawingml/2006/main">
               <a:ext uri="{FF2B5EF4-FFF2-40B4-BE49-F238E27FC236}">
-                <a16:creationId xmlns:a16="http://schemas.microsoft.com/office/drawing/2014/main" id="{D0700BF6-01FB-4DAC-8146-848CF0D61B6B}"/>
+                <a16:creationId xmlns:a16="http://schemas.microsoft.com/office/drawing/2014/main" id="{E7DD9B40-E93D-466A-8879-BC47E48470F1}"/>
               </a:ext>
             </a:extLst>
           </p:cNvPr>
@@ -3001,7 +3001,7 @@
           <p:cNvPr id="17" name="">
             <a:extLst xmlns:a="http://schemas.openxmlformats.org/drawingml/2006/main">
               <a:ext uri="{FF2B5EF4-FFF2-40B4-BE49-F238E27FC236}">
-                <a16:creationId xmlns:a16="http://schemas.microsoft.com/office/drawing/2014/main" id="{D34EDA2E-EA08-4CB4-B200-0407FD107E94}"/>
+                <a16:creationId xmlns:a16="http://schemas.microsoft.com/office/drawing/2014/main" id="{01FEB0A9-5C27-42CF-B07B-7F6CCD71A82E}"/>
               </a:ext>
             </a:extLst>
           </p:cNvPr>
@@ -3089,7 +3089,7 @@
           <p:cNvPr id="18" name="">
             <a:extLst xmlns:a="http://schemas.openxmlformats.org/drawingml/2006/main">
               <a:ext uri="{FF2B5EF4-FFF2-40B4-BE49-F238E27FC236}">
-                <a16:creationId xmlns:a16="http://schemas.microsoft.com/office/drawing/2014/main" id="{03C0F732-3938-4758-898C-003B87BCE100}"/>
+                <a16:creationId xmlns:a16="http://schemas.microsoft.com/office/drawing/2014/main" id="{A17AABEB-8123-4A08-B011-91845A3CD3A1}"/>
               </a:ext>
             </a:extLst>
           </p:cNvPr>
@@ -3150,7 +3150,7 @@
           <p:cNvPr id="19" name="">
             <a:extLst xmlns:a="http://schemas.openxmlformats.org/drawingml/2006/main">
               <a:ext uri="{FF2B5EF4-FFF2-40B4-BE49-F238E27FC236}">
-                <a16:creationId xmlns:a16="http://schemas.microsoft.com/office/drawing/2014/main" id="{9FF605DD-2CFA-43AC-BAF5-C117B6E92569}"/>
+                <a16:creationId xmlns:a16="http://schemas.microsoft.com/office/drawing/2014/main" id="{035C6EAC-CCE1-43E8-A096-814D1788DFAC}"/>
               </a:ext>
             </a:extLst>
           </p:cNvPr>
@@ -3263,7 +3263,7 @@
     </p:spTree>
     <p:extLst>
       <p:ext uri="{BB962C8B-B14F-4D97-AF65-F5344CB8AC3E}">
-        <p14:creationId xmlns:p14="http://schemas.microsoft.com/office/powerpoint/2010/main" val="1054952057"/>
+        <p14:creationId xmlns:p14="http://schemas.microsoft.com/office/powerpoint/2010/main" val="1140327844"/>
       </p:ext>
     </p:extLst>
   </p:cSld>
@@ -3294,7 +3294,7 @@
           <p:cNvPr id="14" name="">
             <a:extLst xmlns:a="http://schemas.openxmlformats.org/drawingml/2006/main">
               <a:ext uri="{FF2B5EF4-FFF2-40B4-BE49-F238E27FC236}">
-                <a16:creationId xmlns:a16="http://schemas.microsoft.com/office/drawing/2014/main" id="{7C3CB889-81D7-467E-B487-8ACCADC8B868}"/>
+                <a16:creationId xmlns:a16="http://schemas.microsoft.com/office/drawing/2014/main" id="{F901BA01-78A0-4547-BF3E-75C6414186BA}"/>
               </a:ext>
             </a:extLst>
           </p:cNvPr>
@@ -3325,7 +3325,7 @@
           <p:cNvPr id="2" name="">
             <a:extLst xmlns:a="http://schemas.openxmlformats.org/drawingml/2006/main">
               <a:ext uri="{FF2B5EF4-FFF2-40B4-BE49-F238E27FC236}">
-                <a16:creationId xmlns:a16="http://schemas.microsoft.com/office/drawing/2014/main" id="{67B7711B-D3EA-4BC4-B99F-BEF13D379C77}"/>
+                <a16:creationId xmlns:a16="http://schemas.microsoft.com/office/drawing/2014/main" id="{276D2F8E-BD64-45E9-BBB7-BBCEC58B19AD}"/>
               </a:ext>
             </a:extLst>
           </p:cNvPr>
@@ -3356,7 +3356,7 @@
           <p:cNvPr id="3" name="">
             <a:extLst xmlns:a="http://schemas.openxmlformats.org/drawingml/2006/main">
               <a:ext uri="{FF2B5EF4-FFF2-40B4-BE49-F238E27FC236}">
-                <a16:creationId xmlns:a16="http://schemas.microsoft.com/office/drawing/2014/main" id="{9B029DFE-1CF1-4033-9BE2-E810568748EF}"/>
+                <a16:creationId xmlns:a16="http://schemas.microsoft.com/office/drawing/2014/main" id="{5D7E1348-EFB5-435C-90CC-FAC85C8C3089}"/>
               </a:ext>
             </a:extLst>
           </p:cNvPr>
@@ -3417,7 +3417,7 @@
           <p:cNvPr id="4" name="">
             <a:extLst xmlns:a="http://schemas.openxmlformats.org/drawingml/2006/main">
               <a:ext uri="{FF2B5EF4-FFF2-40B4-BE49-F238E27FC236}">
-                <a16:creationId xmlns:a16="http://schemas.microsoft.com/office/drawing/2014/main" id="{207279D2-EB18-496C-A63E-152E621E62D5}"/>
+                <a16:creationId xmlns:a16="http://schemas.microsoft.com/office/drawing/2014/main" id="{5E245AF1-822D-43C5-9195-72898B18080A}"/>
               </a:ext>
             </a:extLst>
           </p:cNvPr>
@@ -3478,7 +3478,7 @@
           <p:cNvPr id="5" name="">
             <a:extLst xmlns:a="http://schemas.openxmlformats.org/drawingml/2006/main">
               <a:ext uri="{FF2B5EF4-FFF2-40B4-BE49-F238E27FC236}">
-                <a16:creationId xmlns:a16="http://schemas.microsoft.com/office/drawing/2014/main" id="{E70D965E-20E6-4B98-8283-0640362F5D10}"/>
+                <a16:creationId xmlns:a16="http://schemas.microsoft.com/office/drawing/2014/main" id="{B8B23CA5-1207-472E-9E52-0842319885B7}"/>
               </a:ext>
             </a:extLst>
           </p:cNvPr>
@@ -3543,7 +3543,7 @@
           <p:nvPr/>
         </p:nvPicPr>
         <p:blipFill>
-          <a:blip xmlns:r="http://schemas.openxmlformats.org/officeDocument/2006/relationships" xmlns:a="http://schemas.openxmlformats.org/drawingml/2006/main" r:embed="R8b785c82ef9043d9"/>
+          <a:blip xmlns:r="http://schemas.openxmlformats.org/officeDocument/2006/relationships" xmlns:a="http://schemas.openxmlformats.org/drawingml/2006/main" r:embed="R12af71af7cac4bd7"/>
           <a:stretch xmlns:a="http://schemas.openxmlformats.org/drawingml/2006/main"/>
         </p:blipFill>
         <p:spPr>
@@ -3561,7 +3561,7 @@
           <p:cNvPr id="7" name="">
             <a:extLst xmlns:a="http://schemas.openxmlformats.org/drawingml/2006/main">
               <a:ext uri="{FF2B5EF4-FFF2-40B4-BE49-F238E27FC236}">
-                <a16:creationId xmlns:a16="http://schemas.microsoft.com/office/drawing/2014/main" id="{C595E3B4-D9B0-4F23-8D1C-3554E44A177D}"/>
+                <a16:creationId xmlns:a16="http://schemas.microsoft.com/office/drawing/2014/main" id="{89962235-06B4-4B59-A3BF-7CA94FDFAC11}"/>
               </a:ext>
             </a:extLst>
           </p:cNvPr>
@@ -3622,7 +3622,7 @@
           <p:cNvPr id="8" name="">
             <a:extLst xmlns:a="http://schemas.openxmlformats.org/drawingml/2006/main">
               <a:ext uri="{FF2B5EF4-FFF2-40B4-BE49-F238E27FC236}">
-                <a16:creationId xmlns:a16="http://schemas.microsoft.com/office/drawing/2014/main" id="{35C9C00A-F5A9-4B45-BFBD-A87BF0DE6CD8}"/>
+                <a16:creationId xmlns:a16="http://schemas.microsoft.com/office/drawing/2014/main" id="{706ADF17-4B99-4A9E-81B6-65164B66A3B9}"/>
               </a:ext>
             </a:extLst>
           </p:cNvPr>
@@ -3683,7 +3683,7 @@
           <p:cNvPr id="9" name="">
             <a:extLst xmlns:a="http://schemas.openxmlformats.org/drawingml/2006/main">
               <a:ext uri="{FF2B5EF4-FFF2-40B4-BE49-F238E27FC236}">
-                <a16:creationId xmlns:a16="http://schemas.microsoft.com/office/drawing/2014/main" id="{88F03429-1150-4E04-8E35-02CDF2BF1ACD}"/>
+                <a16:creationId xmlns:a16="http://schemas.microsoft.com/office/drawing/2014/main" id="{B3BE88AC-023C-4A3C-804D-7FD31532A827}"/>
               </a:ext>
             </a:extLst>
           </p:cNvPr>
@@ -3744,7 +3744,7 @@
           <p:cNvPr id="10" name="">
             <a:extLst xmlns:a="http://schemas.openxmlformats.org/drawingml/2006/main">
               <a:ext uri="{FF2B5EF4-FFF2-40B4-BE49-F238E27FC236}">
-                <a16:creationId xmlns:a16="http://schemas.microsoft.com/office/drawing/2014/main" id="{5A054A54-5C05-4851-BD83-341FD085587F}"/>
+                <a16:creationId xmlns:a16="http://schemas.microsoft.com/office/drawing/2014/main" id="{51E8D626-5B2D-47B2-A4E4-783D41A083AA}"/>
               </a:ext>
             </a:extLst>
           </p:cNvPr>
@@ -3805,7 +3805,7 @@
           <p:cNvPr id="11" name="">
             <a:extLst xmlns:a="http://schemas.openxmlformats.org/drawingml/2006/main">
               <a:ext uri="{FF2B5EF4-FFF2-40B4-BE49-F238E27FC236}">
-                <a16:creationId xmlns:a16="http://schemas.microsoft.com/office/drawing/2014/main" id="{1AB0F027-2596-468E-8E15-EF79041F1E90}"/>
+                <a16:creationId xmlns:a16="http://schemas.microsoft.com/office/drawing/2014/main" id="{D57C3CD9-C768-45A2-B4AF-FAC495DB8519}"/>
               </a:ext>
             </a:extLst>
           </p:cNvPr>
@@ -3866,7 +3866,7 @@
           <p:cNvPr id="12" name="">
             <a:extLst xmlns:a="http://schemas.openxmlformats.org/drawingml/2006/main">
               <a:ext uri="{FF2B5EF4-FFF2-40B4-BE49-F238E27FC236}">
-                <a16:creationId xmlns:a16="http://schemas.microsoft.com/office/drawing/2014/main" id="{688626DF-4991-4851-8385-BA17B1A5FEDC}"/>
+                <a16:creationId xmlns:a16="http://schemas.microsoft.com/office/drawing/2014/main" id="{3C0ADE62-688F-42A6-9E3B-D9F9DA75638C}"/>
               </a:ext>
             </a:extLst>
           </p:cNvPr>
@@ -3927,7 +3927,7 @@
           <p:cNvPr id="13" name="">
             <a:extLst xmlns:a="http://schemas.openxmlformats.org/drawingml/2006/main">
               <a:ext uri="{FF2B5EF4-FFF2-40B4-BE49-F238E27FC236}">
-                <a16:creationId xmlns:a16="http://schemas.microsoft.com/office/drawing/2014/main" id="{930E14F1-8471-4169-8C38-19E25ED73B8F}"/>
+                <a16:creationId xmlns:a16="http://schemas.microsoft.com/office/drawing/2014/main" id="{6A2705FA-00EC-4F7A-AE2C-3B6D16F64DC0}"/>
               </a:ext>
             </a:extLst>
           </p:cNvPr>
@@ -4013,7 +4013,7 @@
     </p:spTree>
     <p:extLst>
       <p:ext uri="{BB962C8B-B14F-4D97-AF65-F5344CB8AC3E}">
-        <p14:creationId xmlns:p14="http://schemas.microsoft.com/office/powerpoint/2010/main" val="1987454096"/>
+        <p14:creationId xmlns:p14="http://schemas.microsoft.com/office/powerpoint/2010/main" val="1604643051"/>
       </p:ext>
     </p:extLst>
   </p:cSld>
@@ -4044,7 +4044,7 @@
           <p:cNvPr id="14" name="">
             <a:extLst xmlns:a="http://schemas.openxmlformats.org/drawingml/2006/main">
               <a:ext uri="{FF2B5EF4-FFF2-40B4-BE49-F238E27FC236}">
-                <a16:creationId xmlns:a16="http://schemas.microsoft.com/office/drawing/2014/main" id="{A42982DF-45D4-4CEA-B924-7CC25CF65B85}"/>
+                <a16:creationId xmlns:a16="http://schemas.microsoft.com/office/drawing/2014/main" id="{8EE4D273-28D1-4228-AE3D-1577E65D3EEC}"/>
               </a:ext>
             </a:extLst>
           </p:cNvPr>
@@ -4075,7 +4075,7 @@
           <p:cNvPr id="2" name="">
             <a:extLst xmlns:a="http://schemas.openxmlformats.org/drawingml/2006/main">
               <a:ext uri="{FF2B5EF4-FFF2-40B4-BE49-F238E27FC236}">
-                <a16:creationId xmlns:a16="http://schemas.microsoft.com/office/drawing/2014/main" id="{F561E32A-06AB-47FD-82E1-B22B7C015628}"/>
+                <a16:creationId xmlns:a16="http://schemas.microsoft.com/office/drawing/2014/main" id="{0DD16605-5045-4724-8903-80AD0AC656DE}"/>
               </a:ext>
             </a:extLst>
           </p:cNvPr>
@@ -4106,7 +4106,7 @@
           <p:cNvPr id="3" name="">
             <a:extLst xmlns:a="http://schemas.openxmlformats.org/drawingml/2006/main">
               <a:ext uri="{FF2B5EF4-FFF2-40B4-BE49-F238E27FC236}">
-                <a16:creationId xmlns:a16="http://schemas.microsoft.com/office/drawing/2014/main" id="{AF5AE527-DA01-4808-A342-BF109A45A9F6}"/>
+                <a16:creationId xmlns:a16="http://schemas.microsoft.com/office/drawing/2014/main" id="{B5548010-982C-4221-80BC-98450FAF8D57}"/>
               </a:ext>
             </a:extLst>
           </p:cNvPr>
@@ -4167,7 +4167,7 @@
           <p:cNvPr id="4" name="">
             <a:extLst xmlns:a="http://schemas.openxmlformats.org/drawingml/2006/main">
               <a:ext uri="{FF2B5EF4-FFF2-40B4-BE49-F238E27FC236}">
-                <a16:creationId xmlns:a16="http://schemas.microsoft.com/office/drawing/2014/main" id="{83B705E0-1F63-4174-93AE-BB5DFF1CDA6D}"/>
+                <a16:creationId xmlns:a16="http://schemas.microsoft.com/office/drawing/2014/main" id="{D812A291-1D49-4E7F-B073-7FB2D1213F42}"/>
               </a:ext>
             </a:extLst>
           </p:cNvPr>
@@ -4228,7 +4228,7 @@
           <p:cNvPr id="5" name="">
             <a:extLst xmlns:a="http://schemas.openxmlformats.org/drawingml/2006/main">
               <a:ext uri="{FF2B5EF4-FFF2-40B4-BE49-F238E27FC236}">
-                <a16:creationId xmlns:a16="http://schemas.microsoft.com/office/drawing/2014/main" id="{D24BEF17-42AA-43FC-B6BF-1796191AC918}"/>
+                <a16:creationId xmlns:a16="http://schemas.microsoft.com/office/drawing/2014/main" id="{952A9BC5-F30D-4B08-BE91-F174A8531025}"/>
               </a:ext>
             </a:extLst>
           </p:cNvPr>
@@ -4289,7 +4289,7 @@
           <p:cNvPr id="6" name="">
             <a:extLst xmlns:a="http://schemas.openxmlformats.org/drawingml/2006/main">
               <a:ext uri="{FF2B5EF4-FFF2-40B4-BE49-F238E27FC236}">
-                <a16:creationId xmlns:a16="http://schemas.microsoft.com/office/drawing/2014/main" id="{6294FE04-C0AB-4F08-9DF3-4FE951291907}"/>
+                <a16:creationId xmlns:a16="http://schemas.microsoft.com/office/drawing/2014/main" id="{D97D2446-C50E-4202-87E5-55C6009EEEE1}"/>
               </a:ext>
             </a:extLst>
           </p:cNvPr>
@@ -4350,7 +4350,7 @@
           <p:cNvPr id="7" name="">
             <a:extLst xmlns:a="http://schemas.openxmlformats.org/drawingml/2006/main">
               <a:ext uri="{FF2B5EF4-FFF2-40B4-BE49-F238E27FC236}">
-                <a16:creationId xmlns:a16="http://schemas.microsoft.com/office/drawing/2014/main" id="{4F16AA7C-DE56-42F2-99A1-EE5DF28E92ED}"/>
+                <a16:creationId xmlns:a16="http://schemas.microsoft.com/office/drawing/2014/main" id="{B245D4C0-5F9D-4D44-B590-16F949721EBA}"/>
               </a:ext>
             </a:extLst>
           </p:cNvPr>
@@ -4411,7 +4411,7 @@
           <p:cNvPr id="8" name="">
             <a:extLst xmlns:a="http://schemas.openxmlformats.org/drawingml/2006/main">
               <a:ext uri="{FF2B5EF4-FFF2-40B4-BE49-F238E27FC236}">
-                <a16:creationId xmlns:a16="http://schemas.microsoft.com/office/drawing/2014/main" id="{0718C1EE-0C8D-4A7E-8376-69E5B21DB224}"/>
+                <a16:creationId xmlns:a16="http://schemas.microsoft.com/office/drawing/2014/main" id="{7500E943-D421-4648-B05E-C078A06099B0}"/>
               </a:ext>
             </a:extLst>
           </p:cNvPr>
@@ -4472,7 +4472,7 @@
           <p:cNvPr id="9" name="">
             <a:extLst xmlns:a="http://schemas.openxmlformats.org/drawingml/2006/main">
               <a:ext uri="{FF2B5EF4-FFF2-40B4-BE49-F238E27FC236}">
-                <a16:creationId xmlns:a16="http://schemas.microsoft.com/office/drawing/2014/main" id="{7E10FCAE-8ED8-4C26-AD82-E8C166F376ED}"/>
+                <a16:creationId xmlns:a16="http://schemas.microsoft.com/office/drawing/2014/main" id="{7993AAEE-B109-4D54-BF4D-EBD5202594EB}"/>
               </a:ext>
             </a:extLst>
           </p:cNvPr>
@@ -4503,7 +4503,7 @@
           <p:cNvPr id="10" name="">
             <a:extLst xmlns:a="http://schemas.openxmlformats.org/drawingml/2006/main">
               <a:ext uri="{FF2B5EF4-FFF2-40B4-BE49-F238E27FC236}">
-                <a16:creationId xmlns:a16="http://schemas.microsoft.com/office/drawing/2014/main" id="{E50B1A5F-68A7-4621-9164-5589B519F236}"/>
+                <a16:creationId xmlns:a16="http://schemas.microsoft.com/office/drawing/2014/main" id="{4A191B62-525A-4F5B-BBC8-5EB5CE98E061}"/>
               </a:ext>
             </a:extLst>
           </p:cNvPr>
@@ -4564,7 +4564,7 @@
           <p:cNvPr id="11" name="">
             <a:extLst xmlns:a="http://schemas.openxmlformats.org/drawingml/2006/main">
               <a:ext uri="{FF2B5EF4-FFF2-40B4-BE49-F238E27FC236}">
-                <a16:creationId xmlns:a16="http://schemas.microsoft.com/office/drawing/2014/main" id="{1294FE8C-18A4-44FE-BEC4-18C49EB7BEBE}"/>
+                <a16:creationId xmlns:a16="http://schemas.microsoft.com/office/drawing/2014/main" id="{E4E149DE-C9D5-45E5-93DD-C96D08C8B796}"/>
               </a:ext>
             </a:extLst>
           </p:cNvPr>
@@ -4625,7 +4625,7 @@
           <p:cNvPr id="12" name="">
             <a:extLst xmlns:a="http://schemas.openxmlformats.org/drawingml/2006/main">
               <a:ext uri="{FF2B5EF4-FFF2-40B4-BE49-F238E27FC236}">
-                <a16:creationId xmlns:a16="http://schemas.microsoft.com/office/drawing/2014/main" id="{B7E1BE0F-9516-4DC5-8B85-61FC535F3675}"/>
+                <a16:creationId xmlns:a16="http://schemas.microsoft.com/office/drawing/2014/main" id="{6FE95CA2-A4D1-4621-B8C4-81C5893F6C97}"/>
               </a:ext>
             </a:extLst>
           </p:cNvPr>
@@ -4686,7 +4686,7 @@
           <p:cNvPr id="13" name="">
             <a:extLst xmlns:a="http://schemas.openxmlformats.org/drawingml/2006/main">
               <a:ext uri="{FF2B5EF4-FFF2-40B4-BE49-F238E27FC236}">
-                <a16:creationId xmlns:a16="http://schemas.microsoft.com/office/drawing/2014/main" id="{C869F50F-3F6C-4278-BEF4-66AC672BA33E}"/>
+                <a16:creationId xmlns:a16="http://schemas.microsoft.com/office/drawing/2014/main" id="{761E2E61-82B8-4A07-B794-DCA4CBE6724E}"/>
               </a:ext>
             </a:extLst>
           </p:cNvPr>
@@ -4753,7 +4753,7 @@
     </p:spTree>
     <p:extLst>
       <p:ext uri="{BB962C8B-B14F-4D97-AF65-F5344CB8AC3E}">
-        <p14:creationId xmlns:p14="http://schemas.microsoft.com/office/powerpoint/2010/main" val="1014379753"/>
+        <p14:creationId xmlns:p14="http://schemas.microsoft.com/office/powerpoint/2010/main" val="1907733466"/>
       </p:ext>
     </p:extLst>
   </p:cSld>
@@ -4784,7 +4784,7 @@
           <p:cNvPr id="19" name="">
             <a:extLst xmlns:a="http://schemas.openxmlformats.org/drawingml/2006/main">
               <a:ext uri="{FF2B5EF4-FFF2-40B4-BE49-F238E27FC236}">
-                <a16:creationId xmlns:a16="http://schemas.microsoft.com/office/drawing/2014/main" id="{2974B576-49EF-4801-A48B-65C453D7C75B}"/>
+                <a16:creationId xmlns:a16="http://schemas.microsoft.com/office/drawing/2014/main" id="{D82A6F4A-7788-49E0-89FA-22104C237DC6}"/>
               </a:ext>
             </a:extLst>
           </p:cNvPr>
@@ -4815,7 +4815,7 @@
           <p:cNvPr id="2" name="">
             <a:extLst xmlns:a="http://schemas.openxmlformats.org/drawingml/2006/main">
               <a:ext uri="{FF2B5EF4-FFF2-40B4-BE49-F238E27FC236}">
-                <a16:creationId xmlns:a16="http://schemas.microsoft.com/office/drawing/2014/main" id="{C3E856CE-F877-4C57-87AC-886B427317A4}"/>
+                <a16:creationId xmlns:a16="http://schemas.microsoft.com/office/drawing/2014/main" id="{0BFA0583-B523-45D9-8C56-F671A2C6F2E7}"/>
               </a:ext>
             </a:extLst>
           </p:cNvPr>
@@ -4846,7 +4846,7 @@
           <p:cNvPr id="3" name="">
             <a:extLst xmlns:a="http://schemas.openxmlformats.org/drawingml/2006/main">
               <a:ext uri="{FF2B5EF4-FFF2-40B4-BE49-F238E27FC236}">
-                <a16:creationId xmlns:a16="http://schemas.microsoft.com/office/drawing/2014/main" id="{E205E428-B274-46C7-8A43-D752E35D0DE7}"/>
+                <a16:creationId xmlns:a16="http://schemas.microsoft.com/office/drawing/2014/main" id="{BD5E1B9F-455B-44C4-B669-76AB97742DF0}"/>
               </a:ext>
             </a:extLst>
           </p:cNvPr>
@@ -4907,7 +4907,7 @@
           <p:cNvPr id="4" name="">
             <a:extLst xmlns:a="http://schemas.openxmlformats.org/drawingml/2006/main">
               <a:ext uri="{FF2B5EF4-FFF2-40B4-BE49-F238E27FC236}">
-                <a16:creationId xmlns:a16="http://schemas.microsoft.com/office/drawing/2014/main" id="{3448CC40-5E98-4CD5-8E00-B190F4AEEF4A}"/>
+                <a16:creationId xmlns:a16="http://schemas.microsoft.com/office/drawing/2014/main" id="{C3E692C3-F7A5-431A-A9A9-7B541A1C535D}"/>
               </a:ext>
             </a:extLst>
           </p:cNvPr>
@@ -4968,7 +4968,7 @@
           <p:cNvPr id="5" name="">
             <a:extLst xmlns:a="http://schemas.openxmlformats.org/drawingml/2006/main">
               <a:ext uri="{FF2B5EF4-FFF2-40B4-BE49-F238E27FC236}">
-                <a16:creationId xmlns:a16="http://schemas.microsoft.com/office/drawing/2014/main" id="{73ECBDFD-5F4D-460A-B283-4E0E9EA66DBC}"/>
+                <a16:creationId xmlns:a16="http://schemas.microsoft.com/office/drawing/2014/main" id="{53F90683-552E-4A71-8483-6C2EC0BEF419}"/>
               </a:ext>
             </a:extLst>
           </p:cNvPr>
@@ -5029,7 +5029,7 @@
           <p:cNvPr id="6" name="">
             <a:extLst xmlns:a="http://schemas.openxmlformats.org/drawingml/2006/main">
               <a:ext uri="{FF2B5EF4-FFF2-40B4-BE49-F238E27FC236}">
-                <a16:creationId xmlns:a16="http://schemas.microsoft.com/office/drawing/2014/main" id="{F3A7E54D-57EC-4F9E-B8D9-190A402986E9}"/>
+                <a16:creationId xmlns:a16="http://schemas.microsoft.com/office/drawing/2014/main" id="{773F05C3-580F-4601-A00A-4C428523DF0D}"/>
               </a:ext>
             </a:extLst>
           </p:cNvPr>
@@ -5090,7 +5090,7 @@
           <p:cNvPr id="7" name="">
             <a:extLst xmlns:a="http://schemas.openxmlformats.org/drawingml/2006/main">
               <a:ext uri="{FF2B5EF4-FFF2-40B4-BE49-F238E27FC236}">
-                <a16:creationId xmlns:a16="http://schemas.microsoft.com/office/drawing/2014/main" id="{EFCDAD46-FEBF-4558-9DBD-418910FD64CB}"/>
+                <a16:creationId xmlns:a16="http://schemas.microsoft.com/office/drawing/2014/main" id="{D2B3E84C-436F-445E-B91E-B3F194B50138}"/>
               </a:ext>
             </a:extLst>
           </p:cNvPr>
@@ -5151,7 +5151,7 @@
           <p:cNvPr id="8" name="">
             <a:extLst xmlns:a="http://schemas.openxmlformats.org/drawingml/2006/main">
               <a:ext uri="{FF2B5EF4-FFF2-40B4-BE49-F238E27FC236}">
-                <a16:creationId xmlns:a16="http://schemas.microsoft.com/office/drawing/2014/main" id="{75568B98-1B48-4DEF-9436-453862105BE4}"/>
+                <a16:creationId xmlns:a16="http://schemas.microsoft.com/office/drawing/2014/main" id="{F5B8994B-0358-4C0B-A7FE-363947F4C542}"/>
               </a:ext>
             </a:extLst>
           </p:cNvPr>
@@ -5212,7 +5212,7 @@
           <p:cNvPr id="9" name="">
             <a:extLst xmlns:a="http://schemas.openxmlformats.org/drawingml/2006/main">
               <a:ext uri="{FF2B5EF4-FFF2-40B4-BE49-F238E27FC236}">
-                <a16:creationId xmlns:a16="http://schemas.microsoft.com/office/drawing/2014/main" id="{4CCB0869-03D2-4A37-9744-AB4C557874B2}"/>
+                <a16:creationId xmlns:a16="http://schemas.microsoft.com/office/drawing/2014/main" id="{A27F3BBD-35FE-4B8A-AC39-22E68FA63C32}"/>
               </a:ext>
             </a:extLst>
           </p:cNvPr>
@@ -5243,7 +5243,7 @@
           <p:cNvPr id="10" name="">
             <a:extLst xmlns:a="http://schemas.openxmlformats.org/drawingml/2006/main">
               <a:ext uri="{FF2B5EF4-FFF2-40B4-BE49-F238E27FC236}">
-                <a16:creationId xmlns:a16="http://schemas.microsoft.com/office/drawing/2014/main" id="{668460A7-AE1B-4791-98DD-F13E792C8684}"/>
+                <a16:creationId xmlns:a16="http://schemas.microsoft.com/office/drawing/2014/main" id="{7457E385-9ECB-4168-9A99-E373D88B7FD7}"/>
               </a:ext>
             </a:extLst>
           </p:cNvPr>
@@ -5304,7 +5304,7 @@
           <p:cNvPr id="11" name="">
             <a:extLst xmlns:a="http://schemas.openxmlformats.org/drawingml/2006/main">
               <a:ext uri="{FF2B5EF4-FFF2-40B4-BE49-F238E27FC236}">
-                <a16:creationId xmlns:a16="http://schemas.microsoft.com/office/drawing/2014/main" id="{4C91FF1E-97CE-4859-86ED-5AE32E019EA4}"/>
+                <a16:creationId xmlns:a16="http://schemas.microsoft.com/office/drawing/2014/main" id="{0BDC22B2-C752-418A-9C28-356A017C14E7}"/>
               </a:ext>
             </a:extLst>
           </p:cNvPr>
@@ -5365,7 +5365,7 @@
           <p:cNvPr id="12" name="">
             <a:extLst xmlns:a="http://schemas.openxmlformats.org/drawingml/2006/main">
               <a:ext uri="{FF2B5EF4-FFF2-40B4-BE49-F238E27FC236}">
-                <a16:creationId xmlns:a16="http://schemas.microsoft.com/office/drawing/2014/main" id="{3AF4DEEC-717A-4BB5-9774-0E8B27992BC8}"/>
+                <a16:creationId xmlns:a16="http://schemas.microsoft.com/office/drawing/2014/main" id="{1B44BB46-1586-4CA9-B529-2E5701E5B9E3}"/>
               </a:ext>
             </a:extLst>
           </p:cNvPr>
@@ -5396,7 +5396,7 @@
           <p:cNvPr id="13" name="">
             <a:extLst xmlns:a="http://schemas.openxmlformats.org/drawingml/2006/main">
               <a:ext uri="{FF2B5EF4-FFF2-40B4-BE49-F238E27FC236}">
-                <a16:creationId xmlns:a16="http://schemas.microsoft.com/office/drawing/2014/main" id="{34F9F9CD-1551-4A0E-8D0C-E87C7AF7CA38}"/>
+                <a16:creationId xmlns:a16="http://schemas.microsoft.com/office/drawing/2014/main" id="{A221EB75-F800-410B-8F43-3A8F7A001E11}"/>
               </a:ext>
             </a:extLst>
           </p:cNvPr>
@@ -5457,7 +5457,7 @@
           <p:cNvPr id="14" name="">
             <a:extLst xmlns:a="http://schemas.openxmlformats.org/drawingml/2006/main">
               <a:ext uri="{FF2B5EF4-FFF2-40B4-BE49-F238E27FC236}">
-                <a16:creationId xmlns:a16="http://schemas.microsoft.com/office/drawing/2014/main" id="{7FDD7B09-7758-4B41-BD9A-438504822AC5}"/>
+                <a16:creationId xmlns:a16="http://schemas.microsoft.com/office/drawing/2014/main" id="{235E3E4F-92B2-4745-9DA3-6C8C2B331BE3}"/>
               </a:ext>
             </a:extLst>
           </p:cNvPr>
@@ -5518,7 +5518,7 @@
           <p:cNvPr id="15" name="">
             <a:extLst xmlns:a="http://schemas.openxmlformats.org/drawingml/2006/main">
               <a:ext uri="{FF2B5EF4-FFF2-40B4-BE49-F238E27FC236}">
-                <a16:creationId xmlns:a16="http://schemas.microsoft.com/office/drawing/2014/main" id="{EE808A7F-A5E0-48E5-A210-2ED6BC960121}"/>
+                <a16:creationId xmlns:a16="http://schemas.microsoft.com/office/drawing/2014/main" id="{2103B7CC-1BF9-40DD-99B9-C0BA1593397F}"/>
               </a:ext>
             </a:extLst>
           </p:cNvPr>
@@ -5549,7 +5549,7 @@
           <p:cNvPr id="16" name="">
             <a:extLst xmlns:a="http://schemas.openxmlformats.org/drawingml/2006/main">
               <a:ext uri="{FF2B5EF4-FFF2-40B4-BE49-F238E27FC236}">
-                <a16:creationId xmlns:a16="http://schemas.microsoft.com/office/drawing/2014/main" id="{22A45E89-FDFC-4693-98E0-3CC60CC3EFDB}"/>
+                <a16:creationId xmlns:a16="http://schemas.microsoft.com/office/drawing/2014/main" id="{F344720B-7C6D-4ABA-997F-6BCFE1D2B9C8}"/>
               </a:ext>
             </a:extLst>
           </p:cNvPr>
@@ -5610,7 +5610,7 @@
           <p:cNvPr id="17" name="">
             <a:extLst xmlns:a="http://schemas.openxmlformats.org/drawingml/2006/main">
               <a:ext uri="{FF2B5EF4-FFF2-40B4-BE49-F238E27FC236}">
-                <a16:creationId xmlns:a16="http://schemas.microsoft.com/office/drawing/2014/main" id="{7B818025-80B3-4073-B465-D3DE50E7A718}"/>
+                <a16:creationId xmlns:a16="http://schemas.microsoft.com/office/drawing/2014/main" id="{91BA773A-70DF-4C55-BEBE-EB621DE84198}"/>
               </a:ext>
             </a:extLst>
           </p:cNvPr>
@@ -5671,7 +5671,7 @@
           <p:cNvPr id="18" name="">
             <a:extLst xmlns:a="http://schemas.openxmlformats.org/drawingml/2006/main">
               <a:ext uri="{FF2B5EF4-FFF2-40B4-BE49-F238E27FC236}">
-                <a16:creationId xmlns:a16="http://schemas.microsoft.com/office/drawing/2014/main" id="{2D26B903-C883-4D6C-AF1A-EFAFDA39A2EB}"/>
+                <a16:creationId xmlns:a16="http://schemas.microsoft.com/office/drawing/2014/main" id="{0D445EDC-F8A1-450D-BDCA-6F38386AC3F1}"/>
               </a:ext>
             </a:extLst>
           </p:cNvPr>
@@ -5730,7 +5730,7 @@
     </p:spTree>
     <p:extLst>
       <p:ext uri="{BB962C8B-B14F-4D97-AF65-F5344CB8AC3E}">
-        <p14:creationId xmlns:p14="http://schemas.microsoft.com/office/powerpoint/2010/main" val="848614640"/>
+        <p14:creationId xmlns:p14="http://schemas.microsoft.com/office/powerpoint/2010/main" val="924944945"/>
       </p:ext>
     </p:extLst>
   </p:cSld>
@@ -5761,7 +5761,7 @@
           <p:cNvPr id="14" name="">
             <a:extLst xmlns:a="http://schemas.openxmlformats.org/drawingml/2006/main">
               <a:ext uri="{FF2B5EF4-FFF2-40B4-BE49-F238E27FC236}">
-                <a16:creationId xmlns:a16="http://schemas.microsoft.com/office/drawing/2014/main" id="{4A6FEC1A-9998-4EFD-A4D5-4011A6829AB0}"/>
+                <a16:creationId xmlns:a16="http://schemas.microsoft.com/office/drawing/2014/main" id="{0B0C4421-80BC-4569-89E1-64201F630C43}"/>
               </a:ext>
             </a:extLst>
           </p:cNvPr>
@@ -5792,7 +5792,7 @@
           <p:cNvPr id="2" name="">
             <a:extLst xmlns:a="http://schemas.openxmlformats.org/drawingml/2006/main">
               <a:ext uri="{FF2B5EF4-FFF2-40B4-BE49-F238E27FC236}">
-                <a16:creationId xmlns:a16="http://schemas.microsoft.com/office/drawing/2014/main" id="{BC095DCC-B2B1-434C-87AA-98F6CA05556C}"/>
+                <a16:creationId xmlns:a16="http://schemas.microsoft.com/office/drawing/2014/main" id="{9B9295F9-FF67-4BFA-9285-C064E94B4C4D}"/>
               </a:ext>
             </a:extLst>
           </p:cNvPr>
@@ -5823,7 +5823,7 @@
           <p:cNvPr id="3" name="">
             <a:extLst xmlns:a="http://schemas.openxmlformats.org/drawingml/2006/main">
               <a:ext uri="{FF2B5EF4-FFF2-40B4-BE49-F238E27FC236}">
-                <a16:creationId xmlns:a16="http://schemas.microsoft.com/office/drawing/2014/main" id="{795CE6F7-557B-4FBB-8FE9-FCADEE97D1C6}"/>
+                <a16:creationId xmlns:a16="http://schemas.microsoft.com/office/drawing/2014/main" id="{9303F54A-3DD7-40EA-A467-639A3B67C18F}"/>
               </a:ext>
             </a:extLst>
           </p:cNvPr>
@@ -5884,7 +5884,7 @@
           <p:cNvPr id="4" name="">
             <a:extLst xmlns:a="http://schemas.openxmlformats.org/drawingml/2006/main">
               <a:ext uri="{FF2B5EF4-FFF2-40B4-BE49-F238E27FC236}">
-                <a16:creationId xmlns:a16="http://schemas.microsoft.com/office/drawing/2014/main" id="{A0037C62-9452-4F89-84E5-38B39AD83415}"/>
+                <a16:creationId xmlns:a16="http://schemas.microsoft.com/office/drawing/2014/main" id="{7295535F-C8AF-4E58-A1F4-A66D2E2A517E}"/>
               </a:ext>
             </a:extLst>
           </p:cNvPr>
@@ -5945,7 +5945,7 @@
           <p:cNvPr id="5" name="">
             <a:extLst xmlns:a="http://schemas.openxmlformats.org/drawingml/2006/main">
               <a:ext uri="{FF2B5EF4-FFF2-40B4-BE49-F238E27FC236}">
-                <a16:creationId xmlns:a16="http://schemas.microsoft.com/office/drawing/2014/main" id="{52B82DB1-81FF-443A-A81C-2E5618DAF497}"/>
+                <a16:creationId xmlns:a16="http://schemas.microsoft.com/office/drawing/2014/main" id="{C06A7458-50A6-472F-9F1C-9BA820F7726F}"/>
               </a:ext>
             </a:extLst>
           </p:cNvPr>
@@ -6006,7 +6006,7 @@
           <p:cNvPr id="6" name="">
             <a:extLst xmlns:a="http://schemas.openxmlformats.org/drawingml/2006/main">
               <a:ext uri="{FF2B5EF4-FFF2-40B4-BE49-F238E27FC236}">
-                <a16:creationId xmlns:a16="http://schemas.microsoft.com/office/drawing/2014/main" id="{8593C439-6B1D-4931-9EBC-9FDF978F57F9}"/>
+                <a16:creationId xmlns:a16="http://schemas.microsoft.com/office/drawing/2014/main" id="{E147FE51-E13A-4798-AE25-5F46E0E5436F}"/>
               </a:ext>
             </a:extLst>
           </p:cNvPr>
@@ -6067,7 +6067,7 @@
           <p:cNvPr id="7" name="">
             <a:extLst xmlns:a="http://schemas.openxmlformats.org/drawingml/2006/main">
               <a:ext uri="{FF2B5EF4-FFF2-40B4-BE49-F238E27FC236}">
-                <a16:creationId xmlns:a16="http://schemas.microsoft.com/office/drawing/2014/main" id="{FD45185D-427D-4F0E-A090-4DC42C870D85}"/>
+                <a16:creationId xmlns:a16="http://schemas.microsoft.com/office/drawing/2014/main" id="{4F358634-0BD4-4017-87F6-0655F42078F7}"/>
               </a:ext>
             </a:extLst>
           </p:cNvPr>
@@ -6128,7 +6128,7 @@
           <p:cNvPr id="8" name="">
             <a:extLst xmlns:a="http://schemas.openxmlformats.org/drawingml/2006/main">
               <a:ext uri="{FF2B5EF4-FFF2-40B4-BE49-F238E27FC236}">
-                <a16:creationId xmlns:a16="http://schemas.microsoft.com/office/drawing/2014/main" id="{B9D89529-EA6C-45CF-800B-6A7E96915725}"/>
+                <a16:creationId xmlns:a16="http://schemas.microsoft.com/office/drawing/2014/main" id="{C9F95859-DAF0-41CB-A135-9CEC7ECEE077}"/>
               </a:ext>
             </a:extLst>
           </p:cNvPr>
@@ -6193,7 +6193,7 @@
           <p:nvPr/>
         </p:nvPicPr>
         <p:blipFill>
-          <a:blip xmlns:r="http://schemas.openxmlformats.org/officeDocument/2006/relationships" xmlns:a="http://schemas.openxmlformats.org/drawingml/2006/main" r:embed="R2ceb9f675e514d7c"/>
+          <a:blip xmlns:r="http://schemas.openxmlformats.org/officeDocument/2006/relationships" xmlns:a="http://schemas.openxmlformats.org/drawingml/2006/main" r:embed="R77633aaf887a4dd3"/>
           <a:stretch xmlns:a="http://schemas.openxmlformats.org/drawingml/2006/main"/>
         </p:blipFill>
         <p:spPr>
@@ -6211,7 +6211,7 @@
           <p:cNvPr id="10" name="">
             <a:extLst xmlns:a="http://schemas.openxmlformats.org/drawingml/2006/main">
               <a:ext uri="{FF2B5EF4-FFF2-40B4-BE49-F238E27FC236}">
-                <a16:creationId xmlns:a16="http://schemas.microsoft.com/office/drawing/2014/main" id="{6A0C64BB-5523-4241-9E86-C4477AC82BB4}"/>
+                <a16:creationId xmlns:a16="http://schemas.microsoft.com/office/drawing/2014/main" id="{1F388D09-BC76-4AD6-B003-ACE8DBA18158}"/>
               </a:ext>
             </a:extLst>
           </p:cNvPr>
@@ -6272,7 +6272,7 @@
           <p:cNvPr id="11" name="">
             <a:extLst xmlns:a="http://schemas.openxmlformats.org/drawingml/2006/main">
               <a:ext uri="{FF2B5EF4-FFF2-40B4-BE49-F238E27FC236}">
-                <a16:creationId xmlns:a16="http://schemas.microsoft.com/office/drawing/2014/main" id="{1C4B706D-4725-426B-A442-B4C6796CCE4A}"/>
+                <a16:creationId xmlns:a16="http://schemas.microsoft.com/office/drawing/2014/main" id="{FDB117E7-98F2-46C5-B758-90A79ADE9CA2}"/>
               </a:ext>
             </a:extLst>
           </p:cNvPr>
@@ -6333,7 +6333,7 @@
           <p:cNvPr id="12" name="">
             <a:extLst xmlns:a="http://schemas.openxmlformats.org/drawingml/2006/main">
               <a:ext uri="{FF2B5EF4-FFF2-40B4-BE49-F238E27FC236}">
-                <a16:creationId xmlns:a16="http://schemas.microsoft.com/office/drawing/2014/main" id="{7B13133F-A3E4-4BF3-9DE9-7687ACBB49C5}"/>
+                <a16:creationId xmlns:a16="http://schemas.microsoft.com/office/drawing/2014/main" id="{CACB372C-3B87-4207-B575-18EFAC028460}"/>
               </a:ext>
             </a:extLst>
           </p:cNvPr>
@@ -6394,7 +6394,7 @@
           <p:cNvPr id="13" name="">
             <a:extLst xmlns:a="http://schemas.openxmlformats.org/drawingml/2006/main">
               <a:ext uri="{FF2B5EF4-FFF2-40B4-BE49-F238E27FC236}">
-                <a16:creationId xmlns:a16="http://schemas.microsoft.com/office/drawing/2014/main" id="{3C7B569A-7C3B-4D0F-868D-8C2754B0D2B7}"/>
+                <a16:creationId xmlns:a16="http://schemas.microsoft.com/office/drawing/2014/main" id="{FE971B9C-F51A-4ECC-87F7-C962D2781C4A}"/>
               </a:ext>
             </a:extLst>
           </p:cNvPr>
@@ -6453,7 +6453,7 @@
     </p:spTree>
     <p:extLst>
       <p:ext uri="{BB962C8B-B14F-4D97-AF65-F5344CB8AC3E}">
-        <p14:creationId xmlns:p14="http://schemas.microsoft.com/office/powerpoint/2010/main" val="1036958565"/>
+        <p14:creationId xmlns:p14="http://schemas.microsoft.com/office/powerpoint/2010/main" val="564541134"/>
       </p:ext>
     </p:extLst>
   </p:cSld>
@@ -6484,7 +6484,7 @@
           <p:cNvPr id="21" name="">
             <a:extLst xmlns:a="http://schemas.openxmlformats.org/drawingml/2006/main">
               <a:ext uri="{FF2B5EF4-FFF2-40B4-BE49-F238E27FC236}">
-                <a16:creationId xmlns:a16="http://schemas.microsoft.com/office/drawing/2014/main" id="{C72BA4DB-83AE-40EE-B0C7-1054205FE43A}"/>
+                <a16:creationId xmlns:a16="http://schemas.microsoft.com/office/drawing/2014/main" id="{9A7DD112-AE43-41F4-BB80-9F2AC4627282}"/>
               </a:ext>
             </a:extLst>
           </p:cNvPr>
@@ -6515,7 +6515,7 @@
           <p:cNvPr id="2" name="">
             <a:extLst xmlns:a="http://schemas.openxmlformats.org/drawingml/2006/main">
               <a:ext uri="{FF2B5EF4-FFF2-40B4-BE49-F238E27FC236}">
-                <a16:creationId xmlns:a16="http://schemas.microsoft.com/office/drawing/2014/main" id="{9DA2D1B5-A973-4150-97B1-4FFE9A717CD2}"/>
+                <a16:creationId xmlns:a16="http://schemas.microsoft.com/office/drawing/2014/main" id="{9BD8B61C-EF75-44B6-9061-96E06194FBE0}"/>
               </a:ext>
             </a:extLst>
           </p:cNvPr>
@@ -6546,7 +6546,7 @@
           <p:cNvPr id="3" name="">
             <a:extLst xmlns:a="http://schemas.openxmlformats.org/drawingml/2006/main">
               <a:ext uri="{FF2B5EF4-FFF2-40B4-BE49-F238E27FC236}">
-                <a16:creationId xmlns:a16="http://schemas.microsoft.com/office/drawing/2014/main" id="{ECA9A829-B971-47DF-8848-2C217069855A}"/>
+                <a16:creationId xmlns:a16="http://schemas.microsoft.com/office/drawing/2014/main" id="{64B1A9EA-20EB-4195-9B93-3E9126902A96}"/>
               </a:ext>
             </a:extLst>
           </p:cNvPr>
@@ -6607,7 +6607,7 @@
           <p:cNvPr id="4" name="">
             <a:extLst xmlns:a="http://schemas.openxmlformats.org/drawingml/2006/main">
               <a:ext uri="{FF2B5EF4-FFF2-40B4-BE49-F238E27FC236}">
-                <a16:creationId xmlns:a16="http://schemas.microsoft.com/office/drawing/2014/main" id="{6B9EBF4C-DAE5-42D9-AC61-35635CAA157C}"/>
+                <a16:creationId xmlns:a16="http://schemas.microsoft.com/office/drawing/2014/main" id="{E7706AED-4D08-4570-859E-A9E1554B5FB4}"/>
               </a:ext>
             </a:extLst>
           </p:cNvPr>
@@ -6668,7 +6668,7 @@
           <p:cNvPr id="5" name="">
             <a:extLst xmlns:a="http://schemas.openxmlformats.org/drawingml/2006/main">
               <a:ext uri="{FF2B5EF4-FFF2-40B4-BE49-F238E27FC236}">
-                <a16:creationId xmlns:a16="http://schemas.microsoft.com/office/drawing/2014/main" id="{BC3B22ED-1704-45A0-B5C4-0D2C5812B6EE}"/>
+                <a16:creationId xmlns:a16="http://schemas.microsoft.com/office/drawing/2014/main" id="{8B92266E-2B87-4C8C-A557-B2BD93351B4C}"/>
               </a:ext>
             </a:extLst>
           </p:cNvPr>
@@ -6729,7 +6729,7 @@
           <p:cNvPr id="6" name="">
             <a:extLst xmlns:a="http://schemas.openxmlformats.org/drawingml/2006/main">
               <a:ext uri="{FF2B5EF4-FFF2-40B4-BE49-F238E27FC236}">
-                <a16:creationId xmlns:a16="http://schemas.microsoft.com/office/drawing/2014/main" id="{67EC447E-CA99-45B1-B17B-2166F0A22A1B}"/>
+                <a16:creationId xmlns:a16="http://schemas.microsoft.com/office/drawing/2014/main" id="{33A53932-A29A-4CF1-B4B5-D55937AF9B28}"/>
               </a:ext>
             </a:extLst>
           </p:cNvPr>
@@ -6790,7 +6790,7 @@
           <p:cNvPr id="7" name="">
             <a:extLst xmlns:a="http://schemas.openxmlformats.org/drawingml/2006/main">
               <a:ext uri="{FF2B5EF4-FFF2-40B4-BE49-F238E27FC236}">
-                <a16:creationId xmlns:a16="http://schemas.microsoft.com/office/drawing/2014/main" id="{25CDD890-1155-4559-9DF6-57BF334A9C81}"/>
+                <a16:creationId xmlns:a16="http://schemas.microsoft.com/office/drawing/2014/main" id="{0C54D4B9-4633-482F-878F-50BEEFD4A9B3}"/>
               </a:ext>
             </a:extLst>
           </p:cNvPr>
@@ -6851,7 +6851,7 @@
           <p:cNvPr id="8" name="">
             <a:extLst xmlns:a="http://schemas.openxmlformats.org/drawingml/2006/main">
               <a:ext uri="{FF2B5EF4-FFF2-40B4-BE49-F238E27FC236}">
-                <a16:creationId xmlns:a16="http://schemas.microsoft.com/office/drawing/2014/main" id="{1EB434D3-6B4D-4595-BA0C-B3020426F9C4}"/>
+                <a16:creationId xmlns:a16="http://schemas.microsoft.com/office/drawing/2014/main" id="{4805169C-0449-4FFC-8E05-D16D313DF63F}"/>
               </a:ext>
             </a:extLst>
           </p:cNvPr>
@@ -6912,7 +6912,7 @@
           <p:cNvPr id="9" name="">
             <a:extLst xmlns:a="http://schemas.openxmlformats.org/drawingml/2006/main">
               <a:ext uri="{FF2B5EF4-FFF2-40B4-BE49-F238E27FC236}">
-                <a16:creationId xmlns:a16="http://schemas.microsoft.com/office/drawing/2014/main" id="{01C18945-E1C9-45AD-A893-E4817C85D472}"/>
+                <a16:creationId xmlns:a16="http://schemas.microsoft.com/office/drawing/2014/main" id="{A2F423E7-A678-4371-8D94-42BA5CBB84ED}"/>
               </a:ext>
             </a:extLst>
           </p:cNvPr>
@@ -6943,7 +6943,7 @@
           <p:cNvPr id="10" name="">
             <a:extLst xmlns:a="http://schemas.openxmlformats.org/drawingml/2006/main">
               <a:ext uri="{FF2B5EF4-FFF2-40B4-BE49-F238E27FC236}">
-                <a16:creationId xmlns:a16="http://schemas.microsoft.com/office/drawing/2014/main" id="{8FDD8361-D791-46EA-A8D3-67CBFBC16869}"/>
+                <a16:creationId xmlns:a16="http://schemas.microsoft.com/office/drawing/2014/main" id="{CAD231F7-A702-49E1-9E21-51B0D89A3AEB}"/>
               </a:ext>
             </a:extLst>
           </p:cNvPr>
@@ -7004,7 +7004,7 @@
           <p:cNvPr id="11" name="">
             <a:extLst xmlns:a="http://schemas.openxmlformats.org/drawingml/2006/main">
               <a:ext uri="{FF2B5EF4-FFF2-40B4-BE49-F238E27FC236}">
-                <a16:creationId xmlns:a16="http://schemas.microsoft.com/office/drawing/2014/main" id="{76347176-00A8-4638-AFFF-486C4A070041}"/>
+                <a16:creationId xmlns:a16="http://schemas.microsoft.com/office/drawing/2014/main" id="{2A7DC383-3EF3-4728-88F7-B7271E7B3328}"/>
               </a:ext>
             </a:extLst>
           </p:cNvPr>
@@ -7065,7 +7065,7 @@
           <p:cNvPr id="12" name="">
             <a:extLst xmlns:a="http://schemas.openxmlformats.org/drawingml/2006/main">
               <a:ext uri="{FF2B5EF4-FFF2-40B4-BE49-F238E27FC236}">
-                <a16:creationId xmlns:a16="http://schemas.microsoft.com/office/drawing/2014/main" id="{4019055E-027F-4AA1-A18D-ED606CE0E58B}"/>
+                <a16:creationId xmlns:a16="http://schemas.microsoft.com/office/drawing/2014/main" id="{334ABE48-2EB1-42D6-B669-97DE42F16FED}"/>
               </a:ext>
             </a:extLst>
           </p:cNvPr>
@@ -7096,7 +7096,7 @@
           <p:cNvPr id="13" name="">
             <a:extLst xmlns:a="http://schemas.openxmlformats.org/drawingml/2006/main">
               <a:ext uri="{FF2B5EF4-FFF2-40B4-BE49-F238E27FC236}">
-                <a16:creationId xmlns:a16="http://schemas.microsoft.com/office/drawing/2014/main" id="{A4C5F3D4-568B-4D16-982F-C32E502D4F09}"/>
+                <a16:creationId xmlns:a16="http://schemas.microsoft.com/office/drawing/2014/main" id="{2941F7A9-D83D-44B3-8778-5BC42709DFA3}"/>
               </a:ext>
             </a:extLst>
           </p:cNvPr>
@@ -7157,7 +7157,7 @@
           <p:cNvPr id="14" name="">
             <a:extLst xmlns:a="http://schemas.openxmlformats.org/drawingml/2006/main">
               <a:ext uri="{FF2B5EF4-FFF2-40B4-BE49-F238E27FC236}">
-                <a16:creationId xmlns:a16="http://schemas.microsoft.com/office/drawing/2014/main" id="{480592FC-DFCC-4A01-A9BF-66057162DEA7}"/>
+                <a16:creationId xmlns:a16="http://schemas.microsoft.com/office/drawing/2014/main" id="{5EF6B76C-08CA-4A96-B875-66907B85FBA6}"/>
               </a:ext>
             </a:extLst>
           </p:cNvPr>
@@ -7218,7 +7218,7 @@
           <p:cNvPr id="15" name="">
             <a:extLst xmlns:a="http://schemas.openxmlformats.org/drawingml/2006/main">
               <a:ext uri="{FF2B5EF4-FFF2-40B4-BE49-F238E27FC236}">
-                <a16:creationId xmlns:a16="http://schemas.microsoft.com/office/drawing/2014/main" id="{69808A52-0571-42FF-80A0-09529BF88E26}"/>
+                <a16:creationId xmlns:a16="http://schemas.microsoft.com/office/drawing/2014/main" id="{A4682B10-A664-4049-A1DE-CE4F1438590B}"/>
               </a:ext>
             </a:extLst>
           </p:cNvPr>
@@ -7249,7 +7249,7 @@
           <p:cNvPr id="16" name="">
             <a:extLst xmlns:a="http://schemas.openxmlformats.org/drawingml/2006/main">
               <a:ext uri="{FF2B5EF4-FFF2-40B4-BE49-F238E27FC236}">
-                <a16:creationId xmlns:a16="http://schemas.microsoft.com/office/drawing/2014/main" id="{1BE86364-3EA0-4323-899B-CA6685CA3077}"/>
+                <a16:creationId xmlns:a16="http://schemas.microsoft.com/office/drawing/2014/main" id="{D103EBCF-93D3-4178-B717-01338C51630A}"/>
               </a:ext>
             </a:extLst>
           </p:cNvPr>
@@ -7310,7 +7310,7 @@
           <p:cNvPr id="17" name="">
             <a:extLst xmlns:a="http://schemas.openxmlformats.org/drawingml/2006/main">
               <a:ext uri="{FF2B5EF4-FFF2-40B4-BE49-F238E27FC236}">
-                <a16:creationId xmlns:a16="http://schemas.microsoft.com/office/drawing/2014/main" id="{11C53524-910D-4C66-A95B-44EAFEE19268}"/>
+                <a16:creationId xmlns:a16="http://schemas.microsoft.com/office/drawing/2014/main" id="{02FFA525-4182-4AE8-84E4-9F622CCCD01C}"/>
               </a:ext>
             </a:extLst>
           </p:cNvPr>
@@ -7371,7 +7371,7 @@
           <p:cNvPr id="18" name="">
             <a:extLst xmlns:a="http://schemas.openxmlformats.org/drawingml/2006/main">
               <a:ext uri="{FF2B5EF4-FFF2-40B4-BE49-F238E27FC236}">
-                <a16:creationId xmlns:a16="http://schemas.microsoft.com/office/drawing/2014/main" id="{CA116723-6D2B-4755-9D09-E43D5AFE6A2A}"/>
+                <a16:creationId xmlns:a16="http://schemas.microsoft.com/office/drawing/2014/main" id="{CE08D331-D860-498C-B19E-300A58EC899E}"/>
               </a:ext>
             </a:extLst>
           </p:cNvPr>
@@ -7402,7 +7402,7 @@
           <p:cNvPr id="19" name="">
             <a:extLst xmlns:a="http://schemas.openxmlformats.org/drawingml/2006/main">
               <a:ext uri="{FF2B5EF4-FFF2-40B4-BE49-F238E27FC236}">
-                <a16:creationId xmlns:a16="http://schemas.microsoft.com/office/drawing/2014/main" id="{ACE3326D-568F-476A-A3ED-9055CA8BB359}"/>
+                <a16:creationId xmlns:a16="http://schemas.microsoft.com/office/drawing/2014/main" id="{DEDEBC44-0156-4A8B-A10E-2F8B366E258A}"/>
               </a:ext>
             </a:extLst>
           </p:cNvPr>
@@ -7463,7 +7463,7 @@
           <p:cNvPr id="20" name="">
             <a:extLst xmlns:a="http://schemas.openxmlformats.org/drawingml/2006/main">
               <a:ext uri="{FF2B5EF4-FFF2-40B4-BE49-F238E27FC236}">
-                <a16:creationId xmlns:a16="http://schemas.microsoft.com/office/drawing/2014/main" id="{A2179636-89B3-4030-AA3E-E28EE6F2A717}"/>
+                <a16:creationId xmlns:a16="http://schemas.microsoft.com/office/drawing/2014/main" id="{F29641AD-3E26-4784-B265-E8B08E513AFC}"/>
               </a:ext>
             </a:extLst>
           </p:cNvPr>
@@ -7522,7 +7522,7 @@
     </p:spTree>
     <p:extLst>
       <p:ext uri="{BB962C8B-B14F-4D97-AF65-F5344CB8AC3E}">
-        <p14:creationId xmlns:p14="http://schemas.microsoft.com/office/powerpoint/2010/main" val="1195872143"/>
+        <p14:creationId xmlns:p14="http://schemas.microsoft.com/office/powerpoint/2010/main" val="1876252401"/>
       </p:ext>
     </p:extLst>
   </p:cSld>
@@ -7553,7 +7553,7 @@
           <p:cNvPr id="16" name="">
             <a:extLst xmlns:a="http://schemas.openxmlformats.org/drawingml/2006/main">
               <a:ext uri="{FF2B5EF4-FFF2-40B4-BE49-F238E27FC236}">
-                <a16:creationId xmlns:a16="http://schemas.microsoft.com/office/drawing/2014/main" id="{89516C67-1B65-472C-8D7E-26E400345238}"/>
+                <a16:creationId xmlns:a16="http://schemas.microsoft.com/office/drawing/2014/main" id="{5AE989BB-2E63-4CB1-93FA-2843770B28D8}"/>
               </a:ext>
             </a:extLst>
           </p:cNvPr>
@@ -7584,7 +7584,7 @@
           <p:cNvPr id="2" name="">
             <a:extLst xmlns:a="http://schemas.openxmlformats.org/drawingml/2006/main">
               <a:ext uri="{FF2B5EF4-FFF2-40B4-BE49-F238E27FC236}">
-                <a16:creationId xmlns:a16="http://schemas.microsoft.com/office/drawing/2014/main" id="{43E5148D-5FB8-4963-8892-FE54BFDD4B36}"/>
+                <a16:creationId xmlns:a16="http://schemas.microsoft.com/office/drawing/2014/main" id="{B0E36E0B-CC69-4678-BE20-D53B50A79A49}"/>
               </a:ext>
             </a:extLst>
           </p:cNvPr>
@@ -7615,7 +7615,7 @@
           <p:cNvPr id="3" name="">
             <a:extLst xmlns:a="http://schemas.openxmlformats.org/drawingml/2006/main">
               <a:ext uri="{FF2B5EF4-FFF2-40B4-BE49-F238E27FC236}">
-                <a16:creationId xmlns:a16="http://schemas.microsoft.com/office/drawing/2014/main" id="{F7374BE9-8C8E-49D6-B74A-0DA44594CC1E}"/>
+                <a16:creationId xmlns:a16="http://schemas.microsoft.com/office/drawing/2014/main" id="{08C9F82F-5E9B-4058-8426-7150C5150040}"/>
               </a:ext>
             </a:extLst>
           </p:cNvPr>
@@ -7676,7 +7676,7 @@
           <p:cNvPr id="4" name="">
             <a:extLst xmlns:a="http://schemas.openxmlformats.org/drawingml/2006/main">
               <a:ext uri="{FF2B5EF4-FFF2-40B4-BE49-F238E27FC236}">
-                <a16:creationId xmlns:a16="http://schemas.microsoft.com/office/drawing/2014/main" id="{CF028A5D-C874-42BD-B305-CF0743F1662E}"/>
+                <a16:creationId xmlns:a16="http://schemas.microsoft.com/office/drawing/2014/main" id="{E672DE42-556F-43A3-B864-78CD649978D7}"/>
               </a:ext>
             </a:extLst>
           </p:cNvPr>
@@ -7737,7 +7737,7 @@
           <p:cNvPr id="5" name="">
             <a:extLst xmlns:a="http://schemas.openxmlformats.org/drawingml/2006/main">
               <a:ext uri="{FF2B5EF4-FFF2-40B4-BE49-F238E27FC236}">
-                <a16:creationId xmlns:a16="http://schemas.microsoft.com/office/drawing/2014/main" id="{8500A321-1552-4032-AAEE-752CC1EFA14D}"/>
+                <a16:creationId xmlns:a16="http://schemas.microsoft.com/office/drawing/2014/main" id="{FF1C392C-DB02-4141-AE8E-B6AFFCCAAEAE}"/>
               </a:ext>
             </a:extLst>
           </p:cNvPr>
@@ -7802,7 +7802,7 @@
           <p:nvPr/>
         </p:nvPicPr>
         <p:blipFill>
-          <a:blip xmlns:r="http://schemas.openxmlformats.org/officeDocument/2006/relationships" xmlns:a="http://schemas.openxmlformats.org/drawingml/2006/main" r:embed="Re5365fd151b44fe9"/>
+          <a:blip xmlns:r="http://schemas.openxmlformats.org/officeDocument/2006/relationships" xmlns:a="http://schemas.openxmlformats.org/drawingml/2006/main" r:embed="R98cd66547504474b"/>
           <a:stretch xmlns:a="http://schemas.openxmlformats.org/drawingml/2006/main"/>
         </p:blipFill>
         <p:spPr>
@@ -7820,7 +7820,7 @@
           <p:cNvPr id="7" name="">
             <a:extLst xmlns:a="http://schemas.openxmlformats.org/drawingml/2006/main">
               <a:ext uri="{FF2B5EF4-FFF2-40B4-BE49-F238E27FC236}">
-                <a16:creationId xmlns:a16="http://schemas.microsoft.com/office/drawing/2014/main" id="{892C26EB-FF05-471F-9BCB-513819429540}"/>
+                <a16:creationId xmlns:a16="http://schemas.microsoft.com/office/drawing/2014/main" id="{A408DCE1-2CD8-4219-9951-B8F0755F301F}"/>
               </a:ext>
             </a:extLst>
           </p:cNvPr>
@@ -7881,7 +7881,7 @@
           <p:cNvPr id="8" name="">
             <a:extLst xmlns:a="http://schemas.openxmlformats.org/drawingml/2006/main">
               <a:ext uri="{FF2B5EF4-FFF2-40B4-BE49-F238E27FC236}">
-                <a16:creationId xmlns:a16="http://schemas.microsoft.com/office/drawing/2014/main" id="{E8E95584-E3B5-4166-9F1B-9DA1F92CF9A1}"/>
+                <a16:creationId xmlns:a16="http://schemas.microsoft.com/office/drawing/2014/main" id="{B701704A-0FE8-4CB0-8AE3-60A5EDFDDE29}"/>
               </a:ext>
             </a:extLst>
           </p:cNvPr>
@@ -7942,7 +7942,7 @@
           <p:cNvPr id="9" name="">
             <a:extLst xmlns:a="http://schemas.openxmlformats.org/drawingml/2006/main">
               <a:ext uri="{FF2B5EF4-FFF2-40B4-BE49-F238E27FC236}">
-                <a16:creationId xmlns:a16="http://schemas.microsoft.com/office/drawing/2014/main" id="{651C8673-7A85-4B1B-A678-EF45D0D7C932}"/>
+                <a16:creationId xmlns:a16="http://schemas.microsoft.com/office/drawing/2014/main" id="{9ECD0450-EABB-4B55-A793-0C9E499E3D29}"/>
               </a:ext>
             </a:extLst>
           </p:cNvPr>
@@ -8003,7 +8003,7 @@
           <p:cNvPr id="10" name="">
             <a:extLst xmlns:a="http://schemas.openxmlformats.org/drawingml/2006/main">
               <a:ext uri="{FF2B5EF4-FFF2-40B4-BE49-F238E27FC236}">
-                <a16:creationId xmlns:a16="http://schemas.microsoft.com/office/drawing/2014/main" id="{1FADB09D-3B70-4CD9-9244-0336DD1F66D2}"/>
+                <a16:creationId xmlns:a16="http://schemas.microsoft.com/office/drawing/2014/main" id="{0FD22D15-38BF-4D5A-991E-BEEE9A0CD1F0}"/>
               </a:ext>
             </a:extLst>
           </p:cNvPr>
@@ -8064,7 +8064,7 @@
           <p:cNvPr id="11" name="">
             <a:extLst xmlns:a="http://schemas.openxmlformats.org/drawingml/2006/main">
               <a:ext uri="{FF2B5EF4-FFF2-40B4-BE49-F238E27FC236}">
-                <a16:creationId xmlns:a16="http://schemas.microsoft.com/office/drawing/2014/main" id="{2CD85045-7DFB-47EF-B0D2-64A35E7DB543}"/>
+                <a16:creationId xmlns:a16="http://schemas.microsoft.com/office/drawing/2014/main" id="{561C5965-BC62-4B7D-9E17-167F026AD4E1}"/>
               </a:ext>
             </a:extLst>
           </p:cNvPr>
@@ -8125,7 +8125,7 @@
           <p:cNvPr id="12" name="">
             <a:extLst xmlns:a="http://schemas.openxmlformats.org/drawingml/2006/main">
               <a:ext uri="{FF2B5EF4-FFF2-40B4-BE49-F238E27FC236}">
-                <a16:creationId xmlns:a16="http://schemas.microsoft.com/office/drawing/2014/main" id="{7A068D4F-4155-44BB-A81E-0D39470A7623}"/>
+                <a16:creationId xmlns:a16="http://schemas.microsoft.com/office/drawing/2014/main" id="{A7F4214E-985D-4A51-98FF-09F6B082CA4B}"/>
               </a:ext>
             </a:extLst>
           </p:cNvPr>
@@ -8186,7 +8186,7 @@
           <p:cNvPr id="13" name="">
             <a:extLst xmlns:a="http://schemas.openxmlformats.org/drawingml/2006/main">
               <a:ext uri="{FF2B5EF4-FFF2-40B4-BE49-F238E27FC236}">
-                <a16:creationId xmlns:a16="http://schemas.microsoft.com/office/drawing/2014/main" id="{C9072CE1-2670-4BC2-B6ED-DF99A96D79D4}"/>
+                <a16:creationId xmlns:a16="http://schemas.microsoft.com/office/drawing/2014/main" id="{7DA96EFE-6B81-48DB-867B-9F0324369B52}"/>
               </a:ext>
             </a:extLst>
           </p:cNvPr>
@@ -8274,7 +8274,7 @@
           <p:cNvPr id="14" name="">
             <a:extLst xmlns:a="http://schemas.openxmlformats.org/drawingml/2006/main">
               <a:ext uri="{FF2B5EF4-FFF2-40B4-BE49-F238E27FC236}">
-                <a16:creationId xmlns:a16="http://schemas.microsoft.com/office/drawing/2014/main" id="{EF1F4CA8-0B46-4756-A488-CCEFFE17AE8C}"/>
+                <a16:creationId xmlns:a16="http://schemas.microsoft.com/office/drawing/2014/main" id="{8E8D71D8-46DC-48AC-80B2-4D1C9A4EE64B}"/>
               </a:ext>
             </a:extLst>
           </p:cNvPr>
@@ -8324,9 +8324,9 @@
                 <a:latin typeface="Helvetica Neue"/>
                 <a:ea typeface="Helvetica Neue"/>
                 <a:cs typeface="Helvetica Neue"/>
-                <a:hlinkClick xmlns:r="http://schemas.openxmlformats.org/officeDocument/2006/relationships" r:id="R742875ea80c34d8a"/>
-              </a:rPr>
-              <a:t>https://dividendx.payai.network/demos/</a:t>
+                <a:hlinkClick xmlns:r="http://schemas.openxmlformats.org/officeDocument/2006/relationships" r:id="R34b0256959ae4911"/>
+              </a:rPr>
+              <a:t>https://divx.payai.network/demos/</a:t>
             </a:r>
           </a:p>
         </p:txBody>
@@ -8336,7 +8336,7 @@
           <p:cNvPr id="15" name="">
             <a:extLst xmlns:a="http://schemas.openxmlformats.org/drawingml/2006/main">
               <a:ext uri="{FF2B5EF4-FFF2-40B4-BE49-F238E27FC236}">
-                <a16:creationId xmlns:a16="http://schemas.microsoft.com/office/drawing/2014/main" id="{CF3FA77B-69F6-4D01-B72C-B6544F40BD5D}"/>
+                <a16:creationId xmlns:a16="http://schemas.microsoft.com/office/drawing/2014/main" id="{D82CE92A-64C0-458D-9AEB-809864EF1663}"/>
               </a:ext>
             </a:extLst>
           </p:cNvPr>
@@ -8395,7 +8395,7 @@
     </p:spTree>
     <p:extLst>
       <p:ext uri="{BB962C8B-B14F-4D97-AF65-F5344CB8AC3E}">
-        <p14:creationId xmlns:p14="http://schemas.microsoft.com/office/powerpoint/2010/main" val="1743596345"/>
+        <p14:creationId xmlns:p14="http://schemas.microsoft.com/office/powerpoint/2010/main" val="1853531967"/>
       </p:ext>
     </p:extLst>
   </p:cSld>
@@ -8426,7 +8426,7 @@
           <p:cNvPr id="16" name="">
             <a:extLst xmlns:a="http://schemas.openxmlformats.org/drawingml/2006/main">
               <a:ext uri="{FF2B5EF4-FFF2-40B4-BE49-F238E27FC236}">
-                <a16:creationId xmlns:a16="http://schemas.microsoft.com/office/drawing/2014/main" id="{2C667621-6578-4864-B503-73D9BEAB709D}"/>
+                <a16:creationId xmlns:a16="http://schemas.microsoft.com/office/drawing/2014/main" id="{E9F8E57C-8E9C-4EC7-BA9B-AE4CE0D6DDC6}"/>
               </a:ext>
             </a:extLst>
           </p:cNvPr>
@@ -8457,7 +8457,7 @@
           <p:cNvPr id="2" name="">
             <a:extLst xmlns:a="http://schemas.openxmlformats.org/drawingml/2006/main">
               <a:ext uri="{FF2B5EF4-FFF2-40B4-BE49-F238E27FC236}">
-                <a16:creationId xmlns:a16="http://schemas.microsoft.com/office/drawing/2014/main" id="{EA8D15C6-F976-4CF2-A63F-21AC88DF075D}"/>
+                <a16:creationId xmlns:a16="http://schemas.microsoft.com/office/drawing/2014/main" id="{B6C34BD9-0B39-4AA0-9737-42E31139F99E}"/>
               </a:ext>
             </a:extLst>
           </p:cNvPr>
@@ -8488,7 +8488,7 @@
           <p:cNvPr id="3" name="">
             <a:extLst xmlns:a="http://schemas.openxmlformats.org/drawingml/2006/main">
               <a:ext uri="{FF2B5EF4-FFF2-40B4-BE49-F238E27FC236}">
-                <a16:creationId xmlns:a16="http://schemas.microsoft.com/office/drawing/2014/main" id="{534E530E-0BD8-48EF-AA72-2C4FB3F1D752}"/>
+                <a16:creationId xmlns:a16="http://schemas.microsoft.com/office/drawing/2014/main" id="{13E5245B-F69B-4254-8E4A-5B1C943BADB8}"/>
               </a:ext>
             </a:extLst>
           </p:cNvPr>
@@ -8549,7 +8549,7 @@
           <p:cNvPr id="4" name="">
             <a:extLst xmlns:a="http://schemas.openxmlformats.org/drawingml/2006/main">
               <a:ext uri="{FF2B5EF4-FFF2-40B4-BE49-F238E27FC236}">
-                <a16:creationId xmlns:a16="http://schemas.microsoft.com/office/drawing/2014/main" id="{95BCA428-3230-4C1E-8632-73A1201D7A9A}"/>
+                <a16:creationId xmlns:a16="http://schemas.microsoft.com/office/drawing/2014/main" id="{2C685639-9330-43F8-990A-9E9FFC80617D}"/>
               </a:ext>
             </a:extLst>
           </p:cNvPr>
@@ -8610,7 +8610,7 @@
           <p:cNvPr id="5" name="">
             <a:extLst xmlns:a="http://schemas.openxmlformats.org/drawingml/2006/main">
               <a:ext uri="{FF2B5EF4-FFF2-40B4-BE49-F238E27FC236}">
-                <a16:creationId xmlns:a16="http://schemas.microsoft.com/office/drawing/2014/main" id="{63256CEB-DC5E-47AA-AC4F-D27A85CF69A6}"/>
+                <a16:creationId xmlns:a16="http://schemas.microsoft.com/office/drawing/2014/main" id="{BC15E2F7-959C-4FF6-B849-DB3E413C1B7D}"/>
               </a:ext>
             </a:extLst>
           </p:cNvPr>
@@ -8671,7 +8671,7 @@
           <p:cNvPr id="6" name="">
             <a:extLst xmlns:a="http://schemas.openxmlformats.org/drawingml/2006/main">
               <a:ext uri="{FF2B5EF4-FFF2-40B4-BE49-F238E27FC236}">
-                <a16:creationId xmlns:a16="http://schemas.microsoft.com/office/drawing/2014/main" id="{EB8CEBA0-C325-4DD9-94E5-268C7A7A9215}"/>
+                <a16:creationId xmlns:a16="http://schemas.microsoft.com/office/drawing/2014/main" id="{C45D3BF6-8817-46B5-B263-C2A8109424A4}"/>
               </a:ext>
             </a:extLst>
           </p:cNvPr>
@@ -8732,7 +8732,7 @@
           <p:cNvPr id="7" name="">
             <a:extLst xmlns:a="http://schemas.openxmlformats.org/drawingml/2006/main">
               <a:ext uri="{FF2B5EF4-FFF2-40B4-BE49-F238E27FC236}">
-                <a16:creationId xmlns:a16="http://schemas.microsoft.com/office/drawing/2014/main" id="{5375A3C9-080E-41CB-BA92-E4392BD63F3E}"/>
+                <a16:creationId xmlns:a16="http://schemas.microsoft.com/office/drawing/2014/main" id="{28F32759-FB2A-4993-B085-5782725F7FFD}"/>
               </a:ext>
             </a:extLst>
           </p:cNvPr>
@@ -8847,7 +8847,7 @@
           <p:cNvPr id="8" name="">
             <a:extLst xmlns:a="http://schemas.openxmlformats.org/drawingml/2006/main">
               <a:ext uri="{FF2B5EF4-FFF2-40B4-BE49-F238E27FC236}">
-                <a16:creationId xmlns:a16="http://schemas.microsoft.com/office/drawing/2014/main" id="{A5461592-9C55-4079-B4D7-7CFF17124353}"/>
+                <a16:creationId xmlns:a16="http://schemas.microsoft.com/office/drawing/2014/main" id="{B4ECFA07-980C-45E7-A40A-E4B0CDCB8097}"/>
               </a:ext>
             </a:extLst>
           </p:cNvPr>
@@ -8878,7 +8878,7 @@
           <p:cNvPr id="9" name="">
             <a:extLst xmlns:a="http://schemas.openxmlformats.org/drawingml/2006/main">
               <a:ext uri="{FF2B5EF4-FFF2-40B4-BE49-F238E27FC236}">
-                <a16:creationId xmlns:a16="http://schemas.microsoft.com/office/drawing/2014/main" id="{5B52405A-CACE-446F-AAE7-BE9D80D5FBDD}"/>
+                <a16:creationId xmlns:a16="http://schemas.microsoft.com/office/drawing/2014/main" id="{42C0D9B6-76B1-4C67-81FC-D40B766D1223}"/>
               </a:ext>
             </a:extLst>
           </p:cNvPr>
@@ -8939,7 +8939,7 @@
           <p:cNvPr id="10" name="">
             <a:extLst xmlns:a="http://schemas.openxmlformats.org/drawingml/2006/main">
               <a:ext uri="{FF2B5EF4-FFF2-40B4-BE49-F238E27FC236}">
-                <a16:creationId xmlns:a16="http://schemas.microsoft.com/office/drawing/2014/main" id="{D779293F-3E2B-476E-9211-7BFAC2B7DBA0}"/>
+                <a16:creationId xmlns:a16="http://schemas.microsoft.com/office/drawing/2014/main" id="{8977F74E-3A32-43FE-90AD-A87A61F51592}"/>
               </a:ext>
             </a:extLst>
           </p:cNvPr>
@@ -9054,7 +9054,7 @@
           <p:cNvPr id="11" name="">
             <a:extLst xmlns:a="http://schemas.openxmlformats.org/drawingml/2006/main">
               <a:ext uri="{FF2B5EF4-FFF2-40B4-BE49-F238E27FC236}">
-                <a16:creationId xmlns:a16="http://schemas.microsoft.com/office/drawing/2014/main" id="{4683203A-F7F7-45C7-81E9-BF763829528C}"/>
+                <a16:creationId xmlns:a16="http://schemas.microsoft.com/office/drawing/2014/main" id="{71CD1F73-0BF4-4C0D-9847-60A07BEBC27B}"/>
               </a:ext>
             </a:extLst>
           </p:cNvPr>
@@ -9115,7 +9115,7 @@
           <p:cNvPr id="12" name="">
             <a:extLst xmlns:a="http://schemas.openxmlformats.org/drawingml/2006/main">
               <a:ext uri="{FF2B5EF4-FFF2-40B4-BE49-F238E27FC236}">
-                <a16:creationId xmlns:a16="http://schemas.microsoft.com/office/drawing/2014/main" id="{BCF4A2FC-22FC-49B0-8A78-3AE8B568621A}"/>
+                <a16:creationId xmlns:a16="http://schemas.microsoft.com/office/drawing/2014/main" id="{C5E9D897-2589-4013-88EB-5661AB95D5BA}"/>
               </a:ext>
             </a:extLst>
           </p:cNvPr>
@@ -9146,7 +9146,7 @@
           <p:cNvPr id="13" name="">
             <a:extLst xmlns:a="http://schemas.openxmlformats.org/drawingml/2006/main">
               <a:ext uri="{FF2B5EF4-FFF2-40B4-BE49-F238E27FC236}">
-                <a16:creationId xmlns:a16="http://schemas.microsoft.com/office/drawing/2014/main" id="{C0AFF2BF-7376-4034-A7EA-E9AE57BD4351}"/>
+                <a16:creationId xmlns:a16="http://schemas.microsoft.com/office/drawing/2014/main" id="{8050CB19-ABA7-4FCF-ADAD-387925722A8F}"/>
               </a:ext>
             </a:extLst>
           </p:cNvPr>
@@ -9207,7 +9207,7 @@
           <p:cNvPr id="14" name="">
             <a:extLst xmlns:a="http://schemas.openxmlformats.org/drawingml/2006/main">
               <a:ext uri="{FF2B5EF4-FFF2-40B4-BE49-F238E27FC236}">
-                <a16:creationId xmlns:a16="http://schemas.microsoft.com/office/drawing/2014/main" id="{7DC9AB0C-E865-4FD6-BDDF-44001D5C245D}"/>
+                <a16:creationId xmlns:a16="http://schemas.microsoft.com/office/drawing/2014/main" id="{9E75DE73-683A-4A4D-97BB-E8AC5B0F519F}"/>
               </a:ext>
             </a:extLst>
           </p:cNvPr>
@@ -9258,7 +9258,7 @@
                 <a:ea typeface="Helvetica Neue"/>
                 <a:cs typeface="Helvetica Neue"/>
               </a:rPr>
-              <a:t>dividendx.payai.network</a:t>
+              <a:t>divx.payai.network</a:t>
             </a:r>
           </a:p>
         </p:txBody>
@@ -9268,7 +9268,7 @@
           <p:cNvPr id="15" name="">
             <a:extLst xmlns:a="http://schemas.openxmlformats.org/drawingml/2006/main">
               <a:ext uri="{FF2B5EF4-FFF2-40B4-BE49-F238E27FC236}">
-                <a16:creationId xmlns:a16="http://schemas.microsoft.com/office/drawing/2014/main" id="{4D73FF08-E224-46BA-A7D3-E6800F502927}"/>
+                <a16:creationId xmlns:a16="http://schemas.microsoft.com/office/drawing/2014/main" id="{AC67253A-7D22-45EA-93F4-F049D029C783}"/>
               </a:ext>
             </a:extLst>
           </p:cNvPr>
@@ -9327,7 +9327,7 @@
     </p:spTree>
     <p:extLst>
       <p:ext uri="{BB962C8B-B14F-4D97-AF65-F5344CB8AC3E}">
-        <p14:creationId xmlns:p14="http://schemas.microsoft.com/office/powerpoint/2010/main" val="872451368"/>
+        <p14:creationId xmlns:p14="http://schemas.microsoft.com/office/powerpoint/2010/main" val="487537465"/>
       </p:ext>
     </p:extLst>
   </p:cSld>

--- a/presentation/output/DivX-Stocklana-2026-v4.pptx
+++ b/presentation/output/DivX-Stocklana-2026-v4.pptx
@@ -1100,7 +1100,7 @@
           </a:p>
           <a:p xmlns:a="http://schemas.openxmlformats.org/drawingml/2006/main">
             <a:r>
-              <a:t>Sources and evidence: planning/mainnet-readiness-2026-09-20.md | https://divx.payai.network/ | https://github.com/notorious-d-e-v/dividendx-stocklana | https://hackathons.solana.com/hackathons/stocklana</a:t>
+              <a:t>Sources and evidence: planning/mainnet-readiness-2026-09-20.md | https://divx.payai.network/ | https://github.com/notorious-d-e-v/divx | https://hackathons.solana.com/hackathons/stocklana</a:t>
             </a:r>
           </a:p>
         </p:txBody>
